--- a/system-design-101/vi/lessons/sd-06-015/slides/sd-06-015.pptx
+++ b/system-design-101/vi/lessons/sd-06-015/slides/sd-06-015.pptx
@@ -1914,6 +1914,83 @@
               <a:buNone/>
             </a:pPr>
             <a:r>
+              <a:rPr lang="en-US" sz="3000" dirty="0" spc="2" kern="0">
+                <a:solidFill>
+                  <a:srgbClr val="E4E1D8"/>
+                </a:solidFill>
+                <a:latin typeface="Be Vietnam Pro" pitchFamily="34" charset="0"/>
+                <a:ea typeface="Be Vietnam Pro" pitchFamily="34" charset="-122"/>
+                <a:cs typeface="Be Vietnam Pro" pitchFamily="34" charset="-120"/>
+              </a:rPr>
+              <a:t>Sao</a:t>
+            </a:r>
+            <a:r>
+              <a:rPr lang="en-US" sz="3000" dirty="0" spc="3" kern="0">
+                <a:solidFill>
+                  <a:srgbClr val="E4E1D8"/>
+                </a:solidFill>
+                <a:latin typeface="Be Vietnam Pro" pitchFamily="34" charset="0"/>
+                <a:ea typeface="Be Vietnam Pro" pitchFamily="34" charset="-122"/>
+                <a:cs typeface="Be Vietnam Pro" pitchFamily="34" charset="-120"/>
+              </a:rPr>
+              <a:t> 0</a:t>
+            </a:r>
+            <a:r>
+              <a:rPr lang="en-US" sz="3000" dirty="0" spc="4" kern="0">
+                <a:solidFill>
+                  <a:srgbClr val="E4E1D8"/>
+                </a:solidFill>
+                <a:latin typeface="Be Vietnam Pro" pitchFamily="34" charset="0"/>
+                <a:ea typeface="Be Vietnam Pro" pitchFamily="34" charset="-122"/>
+                <a:cs typeface="Be Vietnam Pro" pitchFamily="34" charset="-120"/>
+              </a:rPr>
+              <a:t> giờ</a:t>
+            </a:r>
+            <a:r>
+              <a:rPr lang="en-US" sz="3000" dirty="0" spc="17" kern="0">
+                <a:solidFill>
+                  <a:srgbClr val="E4E1D8"/>
+                </a:solidFill>
+                <a:latin typeface="Be Vietnam Pro" pitchFamily="34" charset="0"/>
+                <a:ea typeface="Be Vietnam Pro" pitchFamily="34" charset="-122"/>
+                <a:cs typeface="Be Vietnam Pro" pitchFamily="34" charset="-120"/>
+              </a:rPr>
+              <a:t> đêm</a:t>
+            </a:r>
+            <a:r>
+              <a:rPr lang="en-US" sz="3000" dirty="0" spc="2" kern="0">
+                <a:solidFill>
+                  <a:srgbClr val="E4E1D8"/>
+                </a:solidFill>
+                <a:latin typeface="Be Vietnam Pro" pitchFamily="34" charset="0"/>
+                <a:ea typeface="Be Vietnam Pro" pitchFamily="34" charset="-122"/>
+                <a:cs typeface="Be Vietnam Pro" pitchFamily="34" charset="-120"/>
+              </a:rPr>
+              <a:t> cơ</a:t>
+            </a:r>
+            <a:r>
+              <a:rPr lang="en-US" sz="3000" dirty="0" spc="-8" kern="0">
+                <a:solidFill>
+                  <a:srgbClr val="E4E1D8"/>
+                </a:solidFill>
+                <a:latin typeface="Be Vietnam Pro" pitchFamily="34" charset="0"/>
+                <a:ea typeface="Be Vietnam Pro" pitchFamily="34" charset="-122"/>
+                <a:cs typeface="Be Vietnam Pro" pitchFamily="34" charset="-120"/>
+              </a:rPr>
+              <a:t> sở</a:t>
+            </a:r>
+            <a:r>
+              <a:rPr lang="en-US" sz="3000" dirty="0" spc="2" kern="0">
+                <a:solidFill>
+                  <a:srgbClr val="E4E1D8"/>
+                </a:solidFill>
+                <a:latin typeface="Be Vietnam Pro" pitchFamily="34" charset="0"/>
+                <a:ea typeface="Be Vietnam Pro" pitchFamily="34" charset="-122"/>
+                <a:cs typeface="Be Vietnam Pro" pitchFamily="34" charset="-120"/>
+              </a:rPr>
+              <a:t> dữ liệu</a:t>
+            </a:r>
+            <a:r>
               <a:rPr lang="en-US" sz="3000" dirty="0" spc="1" kern="0">
                 <a:solidFill>
                   <a:srgbClr val="E4E1D8"/>
@@ -1922,10 +1999,10 @@
                 <a:ea typeface="Be Vietnam Pro" pitchFamily="34" charset="-122"/>
                 <a:cs typeface="Be Vietnam Pro" pitchFamily="34" charset="-120"/>
               </a:rPr>
-              <a:t>Kiểu</a:t>
-            </a:r>
-            <a:r>
-              <a:rPr lang="en-US" sz="3000" dirty="0" spc="-1" kern="0">
+              <a:t> quá</a:t>
+            </a:r>
+            <a:r>
+              <a:rPr lang="en-US" sz="3000" dirty="0" spc="-13" kern="0">
                 <a:solidFill>
                   <a:srgbClr val="E4E1D8"/>
                 </a:solidFill>
@@ -1933,139 +2010,7 @@
                 <a:ea typeface="Be Vietnam Pro" pitchFamily="34" charset="-122"/>
                 <a:cs typeface="Be Vietnam Pro" pitchFamily="34" charset="-120"/>
               </a:rPr>
-              <a:t> nào</a:t>
-            </a:r>
-            <a:r>
-              <a:rPr lang="en-US" sz="3000" dirty="0" spc="0" kern="0">
-                <a:solidFill>
-                  <a:srgbClr val="E4E1D8"/>
-                </a:solidFill>
-                <a:latin typeface="Be Vietnam Pro" pitchFamily="34" charset="0"/>
-                <a:ea typeface="Be Vietnam Pro" pitchFamily="34" charset="-122"/>
-                <a:cs typeface="Be Vietnam Pro" pitchFamily="34" charset="-120"/>
-              </a:rPr>
-              <a:t> cũng</a:t>
-            </a:r>
-            <a:r>
-              <a:rPr lang="en-US" sz="3000" dirty="0" spc="-41" kern="0">
-                <a:solidFill>
-                  <a:srgbClr val="E4E1D8"/>
-                </a:solidFill>
-                <a:latin typeface="Be Vietnam Pro" pitchFamily="34" charset="0"/>
-                <a:ea typeface="Be Vietnam Pro" pitchFamily="34" charset="-122"/>
-                <a:cs typeface="Be Vietnam Pro" pitchFamily="34" charset="-120"/>
-              </a:rPr>
-              <a:t> kết</a:t>
-            </a:r>
-            <a:r>
-              <a:rPr lang="en-US" sz="3000" dirty="0" spc="0" kern="0">
-                <a:solidFill>
-                  <a:srgbClr val="E4E1D8"/>
-                </a:solidFill>
-                <a:latin typeface="Be Vietnam Pro" pitchFamily="34" charset="0"/>
-                <a:ea typeface="Be Vietnam Pro" pitchFamily="34" charset="-122"/>
-                <a:cs typeface="Be Vietnam Pro" pitchFamily="34" charset="-120"/>
-              </a:rPr>
-              <a:t> thúc</a:t>
-            </a:r>
-            <a:r>
-              <a:rPr lang="en-US" sz="3000" dirty="0" spc="2" kern="0">
-                <a:solidFill>
-                  <a:srgbClr val="E4E1D8"/>
-                </a:solidFill>
-                <a:latin typeface="Be Vietnam Pro" pitchFamily="34" charset="0"/>
-                <a:ea typeface="Be Vietnam Pro" pitchFamily="34" charset="-122"/>
-                <a:cs typeface="Be Vietnam Pro" pitchFamily="34" charset="-120"/>
-              </a:rPr>
-              <a:t> giống</a:t>
-            </a:r>
-            <a:r>
-              <a:rPr lang="en-US" sz="3000" dirty="0" spc="-2" kern="0">
-                <a:solidFill>
-                  <a:srgbClr val="E4E1D8"/>
-                </a:solidFill>
-                <a:latin typeface="Be Vietnam Pro" pitchFamily="34" charset="0"/>
-                <a:ea typeface="Be Vietnam Pro" pitchFamily="34" charset="-122"/>
-                <a:cs typeface="Be Vietnam Pro" pitchFamily="34" charset="-120"/>
-              </a:rPr>
-              <a:t> nhau:</a:t>
-            </a:r>
-            <a:r>
-              <a:rPr lang="en-US" sz="3000" dirty="0" spc="-14" kern="0">
-                <a:solidFill>
-                  <a:srgbClr val="E4E1D8"/>
-                </a:solidFill>
-                <a:latin typeface="Be Vietnam Pro" pitchFamily="34" charset="0"/>
-                <a:ea typeface="Be Vietnam Pro" pitchFamily="34" charset="-122"/>
-                <a:cs typeface="Be Vietnam Pro" pitchFamily="34" charset="-120"/>
-              </a:rPr>
-              <a:t> tải</a:t>
-            </a:r>
-            <a:r>
-              <a:rPr lang="en-US" sz="3000" dirty="0" spc="2" kern="0">
-                <a:solidFill>
-                  <a:srgbClr val="E4E1D8"/>
-                </a:solidFill>
-                <a:latin typeface="Be Vietnam Pro" pitchFamily="34" charset="0"/>
-                <a:ea typeface="Be Vietnam Pro" pitchFamily="34" charset="-122"/>
-                <a:cs typeface="Be Vietnam Pro" pitchFamily="34" charset="-120"/>
-              </a:rPr>
-              <a:t> dồn</a:t>
-            </a:r>
-            <a:r>
-              <a:rPr lang="en-US" sz="3000" dirty="0" spc="-18" kern="0">
-                <a:solidFill>
-                  <a:srgbClr val="E4E1D8"/>
-                </a:solidFill>
-                <a:latin typeface="Be Vietnam Pro" pitchFamily="34" charset="0"/>
-                <a:ea typeface="Be Vietnam Pro" pitchFamily="34" charset="-122"/>
-                <a:cs typeface="Be Vietnam Pro" pitchFamily="34" charset="-120"/>
-              </a:rPr>
-              <a:t> về</a:t>
-            </a:r>
-            <a:r>
-              <a:rPr lang="en-US" sz="3000" dirty="0" spc="2" kern="0">
-                <a:solidFill>
-                  <a:srgbClr val="E4E1D8"/>
-                </a:solidFill>
-                <a:latin typeface="Be Vietnam Pro" pitchFamily="34" charset="0"/>
-                <a:ea typeface="Be Vietnam Pro" pitchFamily="34" charset="-122"/>
-                <a:cs typeface="Be Vietnam Pro" pitchFamily="34" charset="-120"/>
-              </a:rPr>
-              <a:t> cơ</a:t>
-            </a:r>
-            <a:r>
-              <a:rPr lang="en-US" sz="3000" dirty="0" spc="-8" kern="0">
-                <a:solidFill>
-                  <a:srgbClr val="E4E1D8"/>
-                </a:solidFill>
-                <a:latin typeface="Be Vietnam Pro" pitchFamily="34" charset="0"/>
-                <a:ea typeface="Be Vietnam Pro" pitchFamily="34" charset="-122"/>
-                <a:cs typeface="Be Vietnam Pro" pitchFamily="34" charset="-120"/>
-              </a:rPr>
-              <a:t> sở</a:t>
-            </a:r>
-            <a:r>
-              <a:rPr lang="en-US" sz="3000" dirty="0" spc="3" kern="0">
-                <a:solidFill>
-                  <a:srgbClr val="E4E1D8"/>
-                </a:solidFill>
-                <a:latin typeface="Be Vietnam Pro" pitchFamily="34" charset="0"/>
-                <a:ea typeface="Be Vietnam Pro" pitchFamily="34" charset="-122"/>
-                <a:cs typeface="Be Vietnam Pro" pitchFamily="34" charset="-120"/>
-              </a:rPr>
-              <a:t> dữ</a:t>
-            </a:r>
-            <a:r>
-              <a:rPr lang="en-US" sz="3000" dirty="0" spc="1" kern="0">
-                <a:solidFill>
-                  <a:srgbClr val="E4E1D8"/>
-                </a:solidFill>
-                <a:latin typeface="Be Vietnam Pro" pitchFamily="34" charset="0"/>
-                <a:ea typeface="Be Vietnam Pro" pitchFamily="34" charset="-122"/>
-                <a:cs typeface="Be Vietnam Pro" pitchFamily="34" charset="-120"/>
-              </a:rPr>
-              <a:t> liệu.</a:t>
+              <a:t> tải?</a:t>
             </a:r>
             <a:endParaRPr lang="en-US" sz="3000" dirty="0"/>
           </a:p>
@@ -3964,6 +3909,28 @@
               <a:buNone/>
             </a:pPr>
             <a:r>
+              <a:rPr lang="en-US" sz="1800" dirty="0" spc="-3" kern="0">
+                <a:solidFill>
+                  <a:srgbClr val="9AA0B5"/>
+                </a:solidFill>
+                <a:latin typeface="Be Vietnam Pro" pitchFamily="34" charset="0"/>
+                <a:ea typeface="Be Vietnam Pro" pitchFamily="34" charset="-122"/>
+                <a:cs typeface="Be Vietnam Pro" pitchFamily="34" charset="-120"/>
+              </a:rPr>
+              <a:t>Nguồn</a:t>
+            </a:r>
+            <a:r>
+              <a:rPr lang="en-US" sz="1800" dirty="0" spc="-9" kern="0">
+                <a:solidFill>
+                  <a:srgbClr val="9AA0B5"/>
+                </a:solidFill>
+                <a:latin typeface="Be Vietnam Pro" pitchFamily="34" charset="0"/>
+                <a:ea typeface="Be Vietnam Pro" pitchFamily="34" charset="-122"/>
+                <a:cs typeface="Be Vietnam Pro" pitchFamily="34" charset="-120"/>
+              </a:rPr>
+              <a:t> tại</a:t>
+            </a:r>
+            <a:r>
               <a:rPr lang="en-US" sz="1800" dirty="0" spc="-1" kern="0">
                 <a:solidFill>
                   <a:srgbClr val="9AA0B5"/>
@@ -3972,10 +3939,10 @@
                 <a:ea typeface="Be Vietnam Pro" pitchFamily="34" charset="-122"/>
                 <a:cs typeface="Be Vietnam Pro" pitchFamily="34" charset="-120"/>
               </a:rPr>
-              <a:t>Mỗi</a:t>
-            </a:r>
-            <a:r>
-              <a:rPr lang="en-US" sz="1800" dirty="0" spc="-4" kern="0">
+              <a:t> commit</a:t>
+            </a:r>
+            <a:r>
+              <a:rPr lang="en-US" sz="1800" dirty="0" spc="2" kern="0">
                 <a:solidFill>
                   <a:srgbClr val="9AA0B5"/>
                 </a:solidFill>
@@ -3983,10 +3950,10 @@
                 <a:ea typeface="Be Vietnam Pro" pitchFamily="34" charset="-122"/>
                 <a:cs typeface="Be Vietnam Pro" pitchFamily="34" charset="-120"/>
               </a:rPr>
-              <a:t> nguồn</a:t>
-            </a:r>
-            <a:r>
-              <a:rPr lang="en-US" sz="1800" dirty="0" spc="-10" kern="0">
+              <a:t> cố</a:t>
+            </a:r>
+            <a:r>
+              <a:rPr lang="en-US" sz="1800" dirty="0" spc="10" kern="0">
                 <a:solidFill>
                   <a:srgbClr val="9AA0B5"/>
                 </a:solidFill>
@@ -3994,10 +3961,10 @@
                 <a:ea typeface="Be Vietnam Pro" pitchFamily="34" charset="-122"/>
                 <a:cs typeface="Be Vietnam Pro" pitchFamily="34" charset="-120"/>
               </a:rPr>
-              <a:t> tại</a:t>
-            </a:r>
-            <a:r>
-              <a:rPr lang="en-US" sz="1800" dirty="0" spc="-6" kern="0">
+              <a:t> định;</a:t>
+            </a:r>
+            <a:r>
+              <a:rPr lang="en-US" sz="1800" dirty="0" spc="0" kern="0">
                 <a:solidFill>
                   <a:srgbClr val="9AA0B5"/>
                 </a:solidFill>
@@ -4005,10 +3972,10 @@
                 <a:ea typeface="Be Vietnam Pro" pitchFamily="34" charset="-122"/>
                 <a:cs typeface="Be Vietnam Pro" pitchFamily="34" charset="-120"/>
               </a:rPr>
-              <a:t> một</a:t>
-            </a:r>
-            <a:r>
-              <a:rPr lang="en-US" sz="1800" dirty="0" spc="-1" kern="0">
+              <a:t> thử</a:t>
+            </a:r>
+            <a:r>
+              <a:rPr lang="en-US" sz="1800" dirty="0" spc="-15" kern="0">
                 <a:solidFill>
                   <a:srgbClr val="9AA0B5"/>
                 </a:solidFill>
@@ -4016,10 +3983,10 @@
                 <a:ea typeface="Be Vietnam Pro" pitchFamily="34" charset="-122"/>
                 <a:cs typeface="Be Vietnam Pro" pitchFamily="34" charset="-120"/>
               </a:rPr>
-              <a:t> commit</a:t>
-            </a:r>
-            <a:r>
-              <a:rPr lang="en-US" sz="1800" dirty="0" spc="2" kern="0">
+              <a:t> ngày</a:t>
+            </a:r>
+            <a:r>
+              <a:rPr lang="en-US" sz="1800" dirty="0" spc="1" kern="0">
                 <a:solidFill>
                   <a:srgbClr val="9AA0B5"/>
                 </a:solidFill>
@@ -4027,106 +3994,7 @@
                 <a:ea typeface="Be Vietnam Pro" pitchFamily="34" charset="-122"/>
                 <a:cs typeface="Be Vietnam Pro" pitchFamily="34" charset="-120"/>
               </a:rPr>
-              <a:t> cố</a:t>
-            </a:r>
-            <a:r>
-              <a:rPr lang="en-US" sz="1800" dirty="0" spc="11" kern="0">
-                <a:solidFill>
-                  <a:srgbClr val="9AA0B5"/>
-                </a:solidFill>
-                <a:latin typeface="Be Vietnam Pro" pitchFamily="34" charset="0"/>
-                <a:ea typeface="Be Vietnam Pro" pitchFamily="34" charset="-122"/>
-                <a:cs typeface="Be Vietnam Pro" pitchFamily="34" charset="-120"/>
-              </a:rPr>
-              <a:t> định.</a:t>
-            </a:r>
-            <a:r>
-              <a:rPr lang="en-US" sz="1800" dirty="0" spc="0" kern="0">
-                <a:solidFill>
-                  <a:srgbClr val="9AA0B5"/>
-                </a:solidFill>
-                <a:latin typeface="Be Vietnam Pro" pitchFamily="34" charset="0"/>
-                <a:ea typeface="Be Vietnam Pro" pitchFamily="34" charset="-122"/>
-                <a:cs typeface="Be Vietnam Pro" pitchFamily="34" charset="-120"/>
-              </a:rPr>
-              <a:t> Thử</a:t>
-            </a:r>
-            <a:r>
-              <a:rPr lang="en-US" sz="1800" dirty="0" spc="-15" kern="0">
-                <a:solidFill>
-                  <a:srgbClr val="9AA0B5"/>
-                </a:solidFill>
-                <a:latin typeface="Be Vietnam Pro" pitchFamily="34" charset="0"/>
-                <a:ea typeface="Be Vietnam Pro" pitchFamily="34" charset="-122"/>
-                <a:cs typeface="Be Vietnam Pro" pitchFamily="34" charset="-120"/>
-              </a:rPr>
-              <a:t> ngày</a:t>
-            </a:r>
-            <a:r>
-              <a:rPr lang="en-US" sz="1800" dirty="0" spc="1" kern="0">
-                <a:solidFill>
-                  <a:srgbClr val="9AA0B5"/>
-                </a:solidFill>
-                <a:latin typeface="Be Vietnam Pro" pitchFamily="34" charset="0"/>
-                <a:ea typeface="Be Vietnam Pro" pitchFamily="34" charset="-122"/>
-                <a:cs typeface="Be Vietnam Pro" pitchFamily="34" charset="-120"/>
-              </a:rPr>
               <a:t> 2026-10-18.</a:t>
-            </a:r>
-            <a:r>
-              <a:rPr lang="en-US" sz="1800" dirty="0" spc="-2" kern="0">
-                <a:solidFill>
-                  <a:srgbClr val="9AA0B5"/>
-                </a:solidFill>
-                <a:latin typeface="Be Vietnam Pro" pitchFamily="34" charset="0"/>
-                <a:ea typeface="Be Vietnam Pro" pitchFamily="34" charset="-122"/>
-                <a:cs typeface="Be Vietnam Pro" pitchFamily="34" charset="-120"/>
-              </a:rPr>
-              <a:t> Hình</a:t>
-            </a:r>
-            <a:r>
-              <a:rPr lang="en-US" sz="1800" dirty="0" spc="-5" kern="0">
-                <a:solidFill>
-                  <a:srgbClr val="9AA0B5"/>
-                </a:solidFill>
-                <a:latin typeface="Be Vietnam Pro" pitchFamily="34" charset="0"/>
-                <a:ea typeface="Be Vietnam Pro" pitchFamily="34" charset="-122"/>
-                <a:cs typeface="Be Vietnam Pro" pitchFamily="34" charset="-120"/>
-              </a:rPr>
-              <a:t> thiết</a:t>
-            </a:r>
-            <a:r>
-              <a:rPr lang="en-US" sz="1800" dirty="0" spc="-28" kern="0">
-                <a:solidFill>
-                  <a:srgbClr val="9AA0B5"/>
-                </a:solidFill>
-                <a:latin typeface="Be Vietnam Pro" pitchFamily="34" charset="0"/>
-                <a:ea typeface="Be Vietnam Pro" pitchFamily="34" charset="-122"/>
-                <a:cs typeface="Be Vietnam Pro" pitchFamily="34" charset="-120"/>
-              </a:rPr>
-              <a:t> kế</a:t>
-            </a:r>
-            <a:r>
-              <a:rPr lang="en-US" sz="1800" dirty="0" spc="9" kern="0">
-                <a:solidFill>
-                  <a:srgbClr val="9AA0B5"/>
-                </a:solidFill>
-                <a:latin typeface="Be Vietnam Pro" pitchFamily="34" charset="0"/>
-                <a:ea typeface="Be Vietnam Pro" pitchFamily="34" charset="-122"/>
-                <a:cs typeface="Be Vietnam Pro" pitchFamily="34" charset="-120"/>
-              </a:rPr>
-              <a:t> độc</a:t>
-            </a:r>
-            <a:r>
-              <a:rPr lang="en-US" sz="1800" dirty="0" spc="0" kern="0">
-                <a:solidFill>
-                  <a:srgbClr val="9AA0B5"/>
-                </a:solidFill>
-                <a:latin typeface="Be Vietnam Pro" pitchFamily="34" charset="0"/>
-                <a:ea typeface="Be Vietnam Pro" pitchFamily="34" charset="-122"/>
-                <a:cs typeface="Be Vietnam Pro" pitchFamily="34" charset="-120"/>
-              </a:rPr>
-              <a:t> lập.</a:t>
             </a:r>
             <a:endParaRPr lang="en-US" sz="1800" dirty="0"/>
           </a:p>
@@ -4844,7 +4712,7 @@
               <a:t> che</a:t>
             </a:r>
             <a:r>
-              <a:rPr lang="en-US" sz="6900" dirty="0" spc="-5" kern="0">
+              <a:rPr lang="en-US" sz="6900" dirty="0" spc="-8" kern="0">
                 <a:solidFill>
                   <a:srgbClr val="14161C"/>
                 </a:solidFill>
@@ -4852,65 +4720,10 @@
                 <a:ea typeface="Bricolage Grotesque ExtraBold" pitchFamily="34" charset="-122"/>
                 <a:cs typeface="Bricolage Grotesque ExtraBold" pitchFamily="34" charset="-120"/>
               </a:rPr>
-              <a:t> tải</a:t>
-            </a:r>
-            <a:r>
-              <a:rPr lang="en-US" sz="6900" dirty="0" spc="0" kern="0">
-                <a:solidFill>
-                  <a:srgbClr val="14161C"/>
-                </a:solidFill>
-                <a:latin typeface="Bricolage Grotesque ExtraBold" pitchFamily="34" charset="0"/>
-                <a:ea typeface="Bricolage Grotesque ExtraBold" pitchFamily="34" charset="-122"/>
-                <a:cs typeface="Bricolage Grotesque ExtraBold" pitchFamily="34" charset="-120"/>
-              </a:rPr>
-              <a:t> cho</a:t>
-            </a:r>
-            <a:r>
-              <a:rPr lang="en-US" sz="6900" dirty="0" spc="-2" kern="0">
-                <a:solidFill>
-                  <a:srgbClr val="14161C"/>
-                </a:solidFill>
-                <a:latin typeface="Bricolage Grotesque ExtraBold" pitchFamily="34" charset="0"/>
-                <a:ea typeface="Bricolage Grotesque ExtraBold" pitchFamily="34" charset="-122"/>
-                <a:cs typeface="Bricolage Grotesque ExtraBold" pitchFamily="34" charset="-120"/>
-              </a:rPr>
-              <a:t> cơ</a:t>
-            </a:r>
-            <a:r>
-              <a:rPr lang="en-US" sz="6900" dirty="0" spc="1" kern="0">
-                <a:solidFill>
-                  <a:srgbClr val="14161C"/>
-                </a:solidFill>
-                <a:latin typeface="Bricolage Grotesque ExtraBold" pitchFamily="34" charset="0"/>
-                <a:ea typeface="Bricolage Grotesque ExtraBold" pitchFamily="34" charset="-122"/>
-                <a:cs typeface="Bricolage Grotesque ExtraBold" pitchFamily="34" charset="-120"/>
-              </a:rPr>
-              <a:t> sở</a:t>
-            </a:r>
-            <a:r>
-              <a:rPr lang="en-US" sz="6900" dirty="0" spc="-1" kern="0">
-                <a:solidFill>
-                  <a:srgbClr val="14161C"/>
-                </a:solidFill>
-                <a:latin typeface="Bricolage Grotesque ExtraBold" pitchFamily="34" charset="0"/>
-                <a:ea typeface="Bricolage Grotesque ExtraBold" pitchFamily="34" charset="-122"/>
-                <a:cs typeface="Bricolage Grotesque ExtraBold" pitchFamily="34" charset="-120"/>
-              </a:rPr>
-              <a:t> dữ</a:t>
-            </a:r>
-            <a:r>
-              <a:rPr lang="en-US" sz="6900" dirty="0" spc="3" kern="0">
-                <a:solidFill>
-                  <a:srgbClr val="14161C"/>
-                </a:solidFill>
-                <a:latin typeface="Bricolage Grotesque ExtraBold" pitchFamily="34" charset="0"/>
-                <a:ea typeface="Bricolage Grotesque ExtraBold" pitchFamily="34" charset="-122"/>
-                <a:cs typeface="Bricolage Grotesque ExtraBold" pitchFamily="34" charset="-120"/>
-              </a:rPr>
-              <a:t> liệu,</a:t>
-            </a:r>
-            <a:r>
-              <a:rPr lang="en-US" sz="6900" dirty="0" spc="-63" kern="0">
+              <a:t> tải,</a:t>
+            </a:r>
+            <a:r>
+              <a:rPr lang="en-US" sz="6900" dirty="0" spc="-62" kern="0">
                 <a:solidFill>
                   <a:srgbClr val="14161C"/>
                 </a:solidFill>
@@ -4974,7 +4787,7 @@
               <a:buNone/>
             </a:pPr>
             <a:r>
-              <a:rPr lang="en-US" sz="2550" dirty="0" spc="2" kern="0">
+              <a:rPr lang="en-US" sz="2550" dirty="0" spc="-4" kern="0">
                 <a:solidFill>
                   <a:srgbClr val="6B6A66"/>
                 </a:solidFill>
@@ -4982,10 +4795,10 @@
                 <a:ea typeface="Be Vietnam Pro" pitchFamily="34" charset="-122"/>
                 <a:cs typeface="Be Vietnam Pro" pitchFamily="34" charset="-120"/>
               </a:rPr>
-              <a:t>Bài</a:t>
-            </a:r>
-            <a:r>
-              <a:rPr lang="en-US" sz="2550" dirty="0" spc="-9" kern="0">
+              <a:t>Thử</a:t>
+            </a:r>
+            <a:r>
+              <a:rPr lang="en-US" sz="2550" dirty="0" spc="-1" kern="0">
                 <a:solidFill>
                   <a:srgbClr val="6B6A66"/>
                 </a:solidFill>
@@ -4993,10 +4806,10 @@
                 <a:ea typeface="Be Vietnam Pro" pitchFamily="34" charset="-122"/>
                 <a:cs typeface="Be Vietnam Pro" pitchFamily="34" charset="-120"/>
               </a:rPr>
-              <a:t> này</a:t>
-            </a:r>
-            <a:r>
-              <a:rPr lang="en-US" sz="2550" dirty="0" spc="-1" kern="0">
+              <a:t> hai</a:t>
+            </a:r>
+            <a:r>
+              <a:rPr lang="en-US" sz="2550" dirty="0" spc="1" kern="0">
                 <a:solidFill>
                   <a:srgbClr val="6B6A66"/>
                 </a:solidFill>
@@ -5004,7 +4817,18 @@
                 <a:ea typeface="Be Vietnam Pro" pitchFamily="34" charset="-122"/>
                 <a:cs typeface="Be Vietnam Pro" pitchFamily="34" charset="-120"/>
               </a:rPr>
-              <a:t> thử hai</a:t>
+              <a:t> cách:</a:t>
+            </a:r>
+            <a:r>
+              <a:rPr lang="en-US" sz="2550" dirty="0" spc="-2" kern="0">
+                <a:solidFill>
+                  <a:srgbClr val="6B6A66"/>
+                </a:solidFill>
+                <a:latin typeface="Be Vietnam Pro" pitchFamily="34" charset="0"/>
+                <a:ea typeface="Be Vietnam Pro" pitchFamily="34" charset="-122"/>
+                <a:cs typeface="Be Vietnam Pro" pitchFamily="34" charset="-120"/>
+              </a:rPr>
+              <a:t> khóa</a:t>
             </a:r>
             <a:r>
               <a:rPr lang="en-US" sz="2550" dirty="0" spc="0" kern="0">
@@ -5015,10 +4839,10 @@
                 <a:ea typeface="Be Vietnam Pro" pitchFamily="34" charset="-122"/>
                 <a:cs typeface="Be Vietnam Pro" pitchFamily="34" charset="-120"/>
               </a:rPr>
-              <a:t> cách chống dồn</a:t>
-            </a:r>
-            <a:r>
-              <a:rPr lang="en-US" sz="2550" dirty="0" spc="-9" kern="0">
+              <a:t> phân</a:t>
+            </a:r>
+            <a:r>
+              <a:rPr lang="en-US" sz="2550" dirty="0" spc="-10" kern="0">
                 <a:solidFill>
                   <a:srgbClr val="6B6A66"/>
                 </a:solidFill>
@@ -5026,51 +4850,7 @@
                 <a:ea typeface="Be Vietnam Pro" pitchFamily="34" charset="-122"/>
                 <a:cs typeface="Be Vietnam Pro" pitchFamily="34" charset="-120"/>
               </a:rPr>
-              <a:t> tải:</a:t>
-            </a:r>
-            <a:r>
-              <a:rPr lang="en-US" sz="2550" dirty="0" spc="-2" kern="0">
-                <a:solidFill>
-                  <a:srgbClr val="6B6A66"/>
-                </a:solidFill>
-                <a:latin typeface="Be Vietnam Pro" pitchFamily="34" charset="0"/>
-                <a:ea typeface="Be Vietnam Pro" pitchFamily="34" charset="-122"/>
-                <a:cs typeface="Be Vietnam Pro" pitchFamily="34" charset="-120"/>
-              </a:rPr>
-              <a:t> khóa</a:t>
-            </a:r>
-            <a:r>
-              <a:rPr lang="en-US" sz="2550" dirty="0" spc="0" kern="0">
-                <a:solidFill>
-                  <a:srgbClr val="6B6A66"/>
-                </a:solidFill>
-                <a:latin typeface="Be Vietnam Pro" pitchFamily="34" charset="0"/>
-                <a:ea typeface="Be Vietnam Pro" pitchFamily="34" charset="-122"/>
-                <a:cs typeface="Be Vietnam Pro" pitchFamily="34" charset="-120"/>
-              </a:rPr>
-              <a:t> phân</a:t>
-            </a:r>
-            <a:r>
-              <a:rPr lang="en-US" sz="2550" dirty="0" spc="-12" kern="0">
-                <a:solidFill>
-                  <a:srgbClr val="6B6A66"/>
-                </a:solidFill>
-                <a:latin typeface="Be Vietnam Pro" pitchFamily="34" charset="0"/>
-                <a:ea typeface="Be Vietnam Pro" pitchFamily="34" charset="-122"/>
-                <a:cs typeface="Be Vietnam Pro" pitchFamily="34" charset="-120"/>
-              </a:rPr>
-              <a:t> tán</a:t>
-            </a:r>
-            <a:r>
-              <a:rPr lang="en-US" sz="2550" dirty="0" spc="-19" kern="0">
-                <a:solidFill>
-                  <a:srgbClr val="6B6A66"/>
-                </a:solidFill>
-                <a:latin typeface="Be Vietnam Pro" pitchFamily="34" charset="0"/>
-                <a:ea typeface="Be Vietnam Pro" pitchFamily="34" charset="-122"/>
-                <a:cs typeface="Be Vietnam Pro" pitchFamily="34" charset="-120"/>
-              </a:rPr>
-              <a:t> và</a:t>
+              <a:t> tán,</a:t>
             </a:r>
             <a:r>
               <a:rPr lang="en-US" sz="2550" dirty="0" spc="0" kern="0">
@@ -6529,6 +6309,17 @@
               <a:t>Cùng</a:t>
             </a:r>
             <a:r>
+              <a:rPr lang="en-US" sz="1950" b="1" dirty="0" spc="1" kern="0">
+                <a:solidFill>
+                  <a:srgbClr val="E8472B"/>
+                </a:solidFill>
+                <a:latin typeface="Be Vietnam Pro" pitchFamily="34" charset="0"/>
+                <a:ea typeface="Be Vietnam Pro" pitchFamily="34" charset="-122"/>
+                <a:cs typeface="Be Vietnam Pro" pitchFamily="34" charset="-120"/>
+              </a:rPr>
+              <a:t> nạp</a:t>
+            </a:r>
+            <a:r>
               <a:rPr lang="en-US" sz="1950" b="1" dirty="0" spc="0" kern="0">
                 <a:solidFill>
                   <a:srgbClr val="E8472B"/>
@@ -6537,10 +6328,10 @@
                 <a:ea typeface="Be Vietnam Pro" pitchFamily="34" charset="-122"/>
                 <a:cs typeface="Be Vietnam Pro" pitchFamily="34" charset="-120"/>
               </a:rPr>
-              <a:t> nạp,</a:t>
-            </a:r>
-            <a:r>
-              <a:rPr lang="en-US" sz="1950" b="1" dirty="0" spc="-2" kern="0">
+              <a:t> thì</a:t>
+            </a:r>
+            <a:r>
+              <a:rPr lang="en-US" sz="1950" b="1" dirty="0" spc="-3" kern="0">
                 <a:solidFill>
                   <a:srgbClr val="E8472B"/>
                 </a:solidFill>
@@ -6551,6 +6342,17 @@
               <a:t> cùng</a:t>
             </a:r>
             <a:r>
+              <a:rPr lang="en-US" sz="1950" b="1" dirty="0" spc="-6" kern="0">
+                <a:solidFill>
+                  <a:srgbClr val="E8472B"/>
+                </a:solidFill>
+                <a:latin typeface="Be Vietnam Pro" pitchFamily="34" charset="0"/>
+                <a:ea typeface="Be Vietnam Pro" pitchFamily="34" charset="-122"/>
+                <a:cs typeface="Be Vietnam Pro" pitchFamily="34" charset="-120"/>
+              </a:rPr>
+              <a:t> hết</a:t>
+            </a:r>
+            <a:r>
               <a:rPr lang="en-US" sz="1950" b="1" dirty="0" spc="0" kern="0">
                 <a:solidFill>
                   <a:srgbClr val="E8472B"/>
@@ -6559,7 +6361,18 @@
                 <a:ea typeface="Be Vietnam Pro" pitchFamily="34" charset="-122"/>
                 <a:cs typeface="Be Vietnam Pro" pitchFamily="34" charset="-120"/>
               </a:rPr>
-              <a:t> hạn</a:t>
+              <a:t> hạn;</a:t>
+            </a:r>
+            <a:r>
+              <a:rPr lang="en-US" sz="1950" b="1" dirty="0" spc="6" kern="0">
+                <a:solidFill>
+                  <a:srgbClr val="E8472B"/>
+                </a:solidFill>
+                <a:latin typeface="Be Vietnam Pro" pitchFamily="34" charset="0"/>
+                <a:ea typeface="Be Vietnam Pro" pitchFamily="34" charset="-122"/>
+                <a:cs typeface="Be Vietnam Pro" pitchFamily="34" charset="-120"/>
+              </a:rPr>
+              <a:t> chữa:</a:t>
             </a:r>
             <a:r>
               <a:rPr lang="en-US" sz="1950" b="1" dirty="0" spc="-8" kern="0">
@@ -6570,10 +6383,10 @@
                 <a:ea typeface="Be Vietnam Pro" pitchFamily="34" charset="-122"/>
                 <a:cs typeface="Be Vietnam Pro" pitchFamily="34" charset="-120"/>
               </a:rPr>
-              <a:t> sống</a:t>
-            </a:r>
-            <a:r>
-              <a:rPr lang="en-US" sz="1950" b="1" dirty="0" spc="-1" kern="0">
+              <a:t> cộng</a:t>
+            </a:r>
+            <a:r>
+              <a:rPr lang="en-US" sz="1950" b="1" dirty="0" spc="-3" kern="0">
                 <a:solidFill>
                   <a:srgbClr val="E8472B"/>
                 </a:solidFill>
@@ -6581,10 +6394,10 @@
                 <a:ea typeface="Be Vietnam Pro" pitchFamily="34" charset="-122"/>
                 <a:cs typeface="Be Vietnam Pro" pitchFamily="34" charset="-120"/>
               </a:rPr>
-              <a:t> (TTL),</a:t>
-            </a:r>
-            <a:r>
-              <a:rPr lang="en-US" sz="1950" b="1" dirty="0" spc="-3" kern="0">
+              <a:t> ngẫu</a:t>
+            </a:r>
+            <a:r>
+              <a:rPr lang="en-US" sz="1950" b="1" dirty="0" spc="0" kern="0">
                 <a:solidFill>
                   <a:srgbClr val="E8472B"/>
                 </a:solidFill>
@@ -6592,95 +6405,7 @@
                 <a:ea typeface="Be Vietnam Pro" pitchFamily="34" charset="-122"/>
                 <a:cs typeface="Be Vietnam Pro" pitchFamily="34" charset="-120"/>
               </a:rPr>
-              <a:t> cùng</a:t>
-            </a:r>
-            <a:r>
-              <a:rPr lang="en-US" sz="1950" b="1" dirty="0" spc="-6" kern="0">
-                <a:solidFill>
-                  <a:srgbClr val="E8472B"/>
-                </a:solidFill>
-                <a:latin typeface="Be Vietnam Pro" pitchFamily="34" charset="0"/>
-                <a:ea typeface="Be Vietnam Pro" pitchFamily="34" charset="-122"/>
-                <a:cs typeface="Be Vietnam Pro" pitchFamily="34" charset="-120"/>
-              </a:rPr>
-              <a:t> hết</a:t>
-            </a:r>
-            <a:r>
-              <a:rPr lang="en-US" sz="1950" b="1" dirty="0" spc="1" kern="0">
-                <a:solidFill>
-                  <a:srgbClr val="E8472B"/>
-                </a:solidFill>
-                <a:latin typeface="Be Vietnam Pro" pitchFamily="34" charset="0"/>
-                <a:ea typeface="Be Vietnam Pro" pitchFamily="34" charset="-122"/>
-                <a:cs typeface="Be Vietnam Pro" pitchFamily="34" charset="-120"/>
-              </a:rPr>
-              <a:t> hạn.</a:t>
-            </a:r>
-            <a:r>
-              <a:rPr lang="en-US" sz="1950" b="1" dirty="0" spc="5" kern="0">
-                <a:solidFill>
-                  <a:srgbClr val="E8472B"/>
-                </a:solidFill>
-                <a:latin typeface="Be Vietnam Pro" pitchFamily="34" charset="0"/>
-                <a:ea typeface="Be Vietnam Pro" pitchFamily="34" charset="-122"/>
-                <a:cs typeface="Be Vietnam Pro" pitchFamily="34" charset="-120"/>
-              </a:rPr>
-              <a:t> Chữa:</a:t>
-            </a:r>
-            <a:r>
-              <a:rPr lang="en-US" sz="1950" b="1" dirty="0" spc="-8" kern="0">
-                <a:solidFill>
-                  <a:srgbClr val="E8472B"/>
-                </a:solidFill>
-                <a:latin typeface="Be Vietnam Pro" pitchFamily="34" charset="0"/>
-                <a:ea typeface="Be Vietnam Pro" pitchFamily="34" charset="-122"/>
-                <a:cs typeface="Be Vietnam Pro" pitchFamily="34" charset="-120"/>
-              </a:rPr>
-              <a:t> cộng</a:t>
-            </a:r>
-            <a:r>
-              <a:rPr lang="en-US" sz="1950" b="1" dirty="0" spc="-3" kern="0">
-                <a:solidFill>
-                  <a:srgbClr val="E8472B"/>
-                </a:solidFill>
-                <a:latin typeface="Be Vietnam Pro" pitchFamily="34" charset="0"/>
-                <a:ea typeface="Be Vietnam Pro" pitchFamily="34" charset="-122"/>
-                <a:cs typeface="Be Vietnam Pro" pitchFamily="34" charset="-120"/>
-              </a:rPr>
-              <a:t> khoảng ngẫu</a:t>
-            </a:r>
-            <a:r>
-              <a:rPr lang="en-US" sz="1950" b="1" dirty="0" spc="0" kern="0">
-                <a:solidFill>
-                  <a:srgbClr val="E8472B"/>
-                </a:solidFill>
-                <a:latin typeface="Be Vietnam Pro" pitchFamily="34" charset="0"/>
-                <a:ea typeface="Be Vietnam Pro" pitchFamily="34" charset="-122"/>
-                <a:cs typeface="Be Vietnam Pro" pitchFamily="34" charset="-120"/>
-              </a:rPr>
               <a:t> nhiên</a:t>
-            </a:r>
-            <a:r>
-              <a:rPr lang="en-US" sz="1950" b="1" dirty="0" spc="-11" kern="0">
-                <a:solidFill>
-                  <a:srgbClr val="E8472B"/>
-                </a:solidFill>
-                <a:latin typeface="Be Vietnam Pro" pitchFamily="34" charset="0"/>
-                <a:ea typeface="Be Vietnam Pro" pitchFamily="34" charset="-122"/>
-                <a:cs typeface="Be Vietnam Pro" pitchFamily="34" charset="-120"/>
-              </a:rPr>
-              <a:t> vào</a:t>
-            </a:r>
-            <a:r>
-              <a:rPr lang="en-US" sz="1950" b="1" dirty="0" spc="0" kern="0">
-                <a:solidFill>
-                  <a:srgbClr val="E8472B"/>
-                </a:solidFill>
-                <a:latin typeface="Be Vietnam Pro" pitchFamily="34" charset="0"/>
-                <a:ea typeface="Be Vietnam Pro" pitchFamily="34" charset="-122"/>
-                <a:cs typeface="Be Vietnam Pro" pitchFamily="34" charset="-120"/>
-              </a:rPr>
-              <a:t> hạn</a:t>
             </a:r>
             <a:endParaRPr lang="en-US" sz="1950" dirty="0"/>
           </a:p>
@@ -8012,29 +7737,7 @@
                 <a:ea typeface="Be Vietnam Pro" pitchFamily="34" charset="-122"/>
                 <a:cs typeface="Be Vietnam Pro" pitchFamily="34" charset="-120"/>
               </a:rPr>
-              <a:t> riêng</a:t>
-            </a:r>
-            <a:r>
-              <a:rPr lang="en-US" sz="2250" dirty="0" spc="1" kern="0">
-                <a:solidFill>
-                  <a:srgbClr val="9AA0B5"/>
-                </a:solidFill>
-                <a:latin typeface="Be Vietnam Pro" pitchFamily="34" charset="0"/>
-                <a:ea typeface="Be Vietnam Pro" pitchFamily="34" charset="-122"/>
-                <a:cs typeface="Be Vietnam Pro" pitchFamily="34" charset="-120"/>
-              </a:rPr>
-              <a:t> của</a:t>
-            </a:r>
-            <a:r>
-              <a:rPr lang="en-US" sz="2250" dirty="0" spc="3" kern="0">
-                <a:solidFill>
-                  <a:srgbClr val="9AA0B5"/>
-                </a:solidFill>
-                <a:latin typeface="Be Vietnam Pro" pitchFamily="34" charset="0"/>
-                <a:ea typeface="Be Vietnam Pro" pitchFamily="34" charset="-122"/>
-                <a:cs typeface="Be Vietnam Pro" pitchFamily="34" charset="-120"/>
-              </a:rPr>
-              <a:t> nhóm:</a:t>
+              <a:t> riêng:</a:t>
             </a:r>
             <a:r>
               <a:rPr lang="en-US" sz="2250" dirty="0" spc="-11" kern="0">
@@ -8585,7 +8288,7 @@
               <a:buNone/>
             </a:pPr>
             <a:r>
-              <a:rPr lang="en-US" sz="1800" b="1" spc="272" kern="0" dirty="0">
+              <a:rPr lang="en-US" sz="1800" b="1" spc="283" kern="0" dirty="0">
                 <a:solidFill>
                   <a:srgbClr val="B45309"/>
                 </a:solidFill>
@@ -8593,10 +8296,10 @@
                 <a:ea typeface="Be Vietnam Pro" pitchFamily="34" charset="-122"/>
                 <a:cs typeface="Be Vietnam Pro" pitchFamily="34" charset="-120"/>
               </a:rPr>
-              <a:t>MỘT</a:t>
-            </a:r>
-            <a:r>
-              <a:rPr lang="en-US" sz="1800" b="1" spc="287" kern="0" dirty="0">
+              <a:t>KHÓA</a:t>
+            </a:r>
+            <a:r>
+              <a:rPr lang="en-US" sz="1800" b="1" spc="300" kern="0" dirty="0">
                 <a:solidFill>
                   <a:srgbClr val="B45309"/>
                 </a:solidFill>
@@ -8604,10 +8307,10 @@
                 <a:ea typeface="Be Vietnam Pro" pitchFamily="34" charset="-122"/>
                 <a:cs typeface="Be Vietnam Pro" pitchFamily="34" charset="-120"/>
               </a:rPr>
-              <a:t> KHÓA</a:t>
-            </a:r>
-            <a:r>
-              <a:rPr lang="en-US" sz="1800" b="1" spc="300" kern="0" dirty="0">
+              <a:t> NÓNG ·</a:t>
+            </a:r>
+            <a:r>
+              <a:rPr lang="en-US" sz="1800" b="1" spc="301" kern="0" dirty="0">
                 <a:solidFill>
                   <a:srgbClr val="B45309"/>
                 </a:solidFill>
@@ -8615,76 +8318,32 @@
                 <a:ea typeface="Be Vietnam Pro" pitchFamily="34" charset="-122"/>
                 <a:cs typeface="Be Vietnam Pro" pitchFamily="34" charset="-120"/>
               </a:rPr>
-              <a:t> NÓNG</a:t>
+              <a:t> 50</a:t>
+            </a:r>
+            <a:r>
+              <a:rPr lang="en-US" sz="1800" b="1" spc="302" kern="0" dirty="0">
+                <a:solidFill>
+                  <a:srgbClr val="B45309"/>
+                </a:solidFill>
+                <a:latin typeface="Be Vietnam Pro" pitchFamily="34" charset="0"/>
+                <a:ea typeface="Be Vietnam Pro" pitchFamily="34" charset="-122"/>
+                <a:cs typeface="Be Vietnam Pro" pitchFamily="34" charset="-120"/>
+              </a:rPr>
+              <a:t> YÊU</a:t>
+            </a:r>
+            <a:r>
+              <a:rPr lang="en-US" sz="1800" b="1" spc="286" kern="0" dirty="0">
+                <a:solidFill>
+                  <a:srgbClr val="B45309"/>
+                </a:solidFill>
+                <a:latin typeface="Be Vietnam Pro" pitchFamily="34" charset="0"/>
+                <a:ea typeface="Be Vietnam Pro" pitchFamily="34" charset="-122"/>
+                <a:cs typeface="Be Vietnam Pro" pitchFamily="34" charset="-120"/>
+              </a:rPr>
+              <a:t> CẦU,</a:t>
             </a:r>
             <a:r>
               <a:rPr lang="en-US" sz="1800" b="1" spc="301" kern="0" dirty="0">
-                <a:solidFill>
-                  <a:srgbClr val="B45309"/>
-                </a:solidFill>
-                <a:latin typeface="Be Vietnam Pro" pitchFamily="34" charset="0"/>
-                <a:ea typeface="Be Vietnam Pro" pitchFamily="34" charset="-122"/>
-                <a:cs typeface="Be Vietnam Pro" pitchFamily="34" charset="-120"/>
-              </a:rPr>
-              <a:t> HẾT</a:t>
-            </a:r>
-            <a:r>
-              <a:rPr lang="en-US" sz="1800" b="1" spc="300" kern="0" dirty="0">
-                <a:solidFill>
-                  <a:srgbClr val="B45309"/>
-                </a:solidFill>
-                <a:latin typeface="Be Vietnam Pro" pitchFamily="34" charset="0"/>
-                <a:ea typeface="Be Vietnam Pro" pitchFamily="34" charset="-122"/>
-                <a:cs typeface="Be Vietnam Pro" pitchFamily="34" charset="-120"/>
-              </a:rPr>
-              <a:t> HẠN ·</a:t>
-            </a:r>
-            <a:r>
-              <a:rPr lang="en-US" sz="1800" b="1" spc="301" kern="0" dirty="0">
-                <a:solidFill>
-                  <a:srgbClr val="B45309"/>
-                </a:solidFill>
-                <a:latin typeface="Be Vietnam Pro" pitchFamily="34" charset="0"/>
-                <a:ea typeface="Be Vietnam Pro" pitchFamily="34" charset="-122"/>
-                <a:cs typeface="Be Vietnam Pro" pitchFamily="34" charset="-120"/>
-              </a:rPr>
-              <a:t> 50</a:t>
-            </a:r>
-            <a:r>
-              <a:rPr lang="en-US" sz="1800" b="1" spc="302" kern="0" dirty="0">
-                <a:solidFill>
-                  <a:srgbClr val="B45309"/>
-                </a:solidFill>
-                <a:latin typeface="Be Vietnam Pro" pitchFamily="34" charset="0"/>
-                <a:ea typeface="Be Vietnam Pro" pitchFamily="34" charset="-122"/>
-                <a:cs typeface="Be Vietnam Pro" pitchFamily="34" charset="-120"/>
-              </a:rPr>
-              <a:t> YÊU</a:t>
-            </a:r>
-            <a:r>
-              <a:rPr lang="en-US" sz="1800" b="1" spc="284" kern="0" dirty="0">
-                <a:solidFill>
-                  <a:srgbClr val="B45309"/>
-                </a:solidFill>
-                <a:latin typeface="Be Vietnam Pro" pitchFamily="34" charset="0"/>
-                <a:ea typeface="Be Vietnam Pro" pitchFamily="34" charset="-122"/>
-                <a:cs typeface="Be Vietnam Pro" pitchFamily="34" charset="-120"/>
-              </a:rPr>
-              <a:t> CẦU</a:t>
-            </a:r>
-            <a:r>
-              <a:rPr lang="en-US" sz="1800" b="1" spc="301" kern="0" dirty="0">
-                <a:solidFill>
-                  <a:srgbClr val="B45309"/>
-                </a:solidFill>
-                <a:latin typeface="Be Vietnam Pro" pitchFamily="34" charset="0"/>
-                <a:ea typeface="Be Vietnam Pro" pitchFamily="34" charset="-122"/>
-                <a:cs typeface="Be Vietnam Pro" pitchFamily="34" charset="-120"/>
-              </a:rPr>
-              <a:t> CÙNG LÚC,</a:t>
-            </a:r>
-            <a:r>
-              <a:rPr lang="en-US" sz="1800" b="1" spc="299" kern="0" dirty="0">
                 <a:solidFill>
                   <a:srgbClr val="B45309"/>
                 </a:solidFill>
@@ -10001,7 +9660,7 @@
               <a:t> gộp</a:t>
             </a:r>
             <a:r>
-              <a:rPr lang="en-US" sz="2100" dirty="0" spc="-5" kern="0">
+              <a:rPr lang="en-US" sz="2100" dirty="0" spc="-9" kern="0">
                 <a:solidFill>
                   <a:srgbClr val="6B6A66"/>
                 </a:solidFill>
@@ -10009,10 +9668,10 @@
                 <a:ea typeface="Be Vietnam Pro" pitchFamily="34" charset="-122"/>
                 <a:cs typeface="Be Vietnam Pro" pitchFamily="34" charset="-120"/>
               </a:rPr>
-              <a:t> ở</a:t>
-            </a:r>
-            <a:r>
-              <a:rPr lang="en-US" sz="2100" dirty="0" spc="-9" kern="0">
+              <a:t> này</a:t>
+            </a:r>
+            <a:r>
+              <a:rPr lang="en-US" sz="2100" dirty="0" spc="-4" kern="0">
                 <a:solidFill>
                   <a:srgbClr val="6B6A66"/>
                 </a:solidFill>
@@ -10020,10 +9679,10 @@
                 <a:ea typeface="Be Vietnam Pro" pitchFamily="34" charset="-122"/>
                 <a:cs typeface="Be Vietnam Pro" pitchFamily="34" charset="-120"/>
               </a:rPr>
-              <a:t> bộ</a:t>
-            </a:r>
-            <a:r>
-              <a:rPr lang="en-US" sz="2100" dirty="0" spc="-2" kern="0">
+              <a:t> là</a:t>
+            </a:r>
+            <a:r>
+              <a:rPr lang="en-US" sz="2100" dirty="0" spc="-16" kern="0">
                 <a:solidFill>
                   <a:srgbClr val="6B6A66"/>
                 </a:solidFill>
@@ -10031,10 +9690,10 @@
                 <a:ea typeface="Be Vietnam Pro" pitchFamily="34" charset="-122"/>
                 <a:cs typeface="Be Vietnam Pro" pitchFamily="34" charset="-120"/>
               </a:rPr>
-              <a:t> nhớ</a:t>
-            </a:r>
-            <a:r>
-              <a:rPr lang="en-US" sz="2100" dirty="0" spc="11" kern="0">
+              <a:t> request</a:t>
+            </a:r>
+            <a:r>
+              <a:rPr lang="en-US" sz="2100" dirty="0" spc="-4" kern="0">
                 <a:solidFill>
                   <a:srgbClr val="6B6A66"/>
                 </a:solidFill>
@@ -10042,128 +9701,7 @@
                 <a:ea typeface="Be Vietnam Pro" pitchFamily="34" charset="-122"/>
                 <a:cs typeface="Be Vietnam Pro" pitchFamily="34" charset="-120"/>
               </a:rPr>
-              <a:t> đệm</a:t>
-            </a:r>
-            <a:r>
-              <a:rPr lang="en-US" sz="2100" dirty="0" spc="0" kern="0">
-                <a:solidFill>
-                  <a:srgbClr val="6B6A66"/>
-                </a:solidFill>
-                <a:latin typeface="Be Vietnam Pro" pitchFamily="34" charset="0"/>
-                <a:ea typeface="Be Vietnam Pro" pitchFamily="34" charset="-122"/>
-                <a:cs typeface="Be Vietnam Pro" pitchFamily="34" charset="-120"/>
-              </a:rPr>
-              <a:t> dùng chung</a:t>
-            </a:r>
-            <a:r>
-              <a:rPr lang="en-US" sz="2100" dirty="0" spc="-4" kern="0">
-                <a:solidFill>
-                  <a:srgbClr val="6B6A66"/>
-                </a:solidFill>
-                <a:latin typeface="Be Vietnam Pro" pitchFamily="34" charset="0"/>
-                <a:ea typeface="Be Vietnam Pro" pitchFamily="34" charset="-122"/>
-                <a:cs typeface="Be Vietnam Pro" pitchFamily="34" charset="-120"/>
-              </a:rPr>
-              <a:t> là</a:t>
-            </a:r>
-            <a:r>
-              <a:rPr lang="en-US" sz="2100" dirty="0" spc="-17" kern="0">
-                <a:solidFill>
-                  <a:srgbClr val="6B6A66"/>
-                </a:solidFill>
-                <a:latin typeface="Be Vietnam Pro" pitchFamily="34" charset="0"/>
-                <a:ea typeface="Be Vietnam Pro" pitchFamily="34" charset="-122"/>
-                <a:cs typeface="Be Vietnam Pro" pitchFamily="34" charset="-120"/>
-              </a:rPr>
-              <a:t> request</a:t>
-            </a:r>
-            <a:r>
-              <a:rPr lang="en-US" sz="2100" dirty="0" spc="-4" kern="0">
-                <a:solidFill>
-                  <a:srgbClr val="6B6A66"/>
-                </a:solidFill>
-                <a:latin typeface="Be Vietnam Pro" pitchFamily="34" charset="0"/>
-                <a:ea typeface="Be Vietnam Pro" pitchFamily="34" charset="-122"/>
-                <a:cs typeface="Be Vietnam Pro" pitchFamily="34" charset="-120"/>
-              </a:rPr>
               <a:t> collapse.</a:t>
-            </a:r>
-            <a:r>
-              <a:rPr lang="en-US" sz="2100" dirty="0" spc="-2" kern="0">
-                <a:solidFill>
-                  <a:srgbClr val="6B6A66"/>
-                </a:solidFill>
-                <a:latin typeface="Be Vietnam Pro" pitchFamily="34" charset="0"/>
-                <a:ea typeface="Be Vietnam Pro" pitchFamily="34" charset="-122"/>
-                <a:cs typeface="Be Vietnam Pro" pitchFamily="34" charset="-120"/>
-              </a:rPr>
-              <a:t> So</a:t>
-            </a:r>
-            <a:r>
-              <a:rPr lang="en-US" sz="2100" dirty="0" spc="-23" kern="0">
-                <a:solidFill>
-                  <a:srgbClr val="6B6A66"/>
-                </a:solidFill>
-                <a:latin typeface="Be Vietnam Pro" pitchFamily="34" charset="0"/>
-                <a:ea typeface="Be Vietnam Pro" pitchFamily="34" charset="-122"/>
-                <a:cs typeface="Be Vietnam Pro" pitchFamily="34" charset="-120"/>
-              </a:rPr>
-              <a:t> rồi</a:t>
-            </a:r>
-            <a:r>
-              <a:rPr lang="en-US" sz="2100" dirty="0" spc="-22" kern="0">
-                <a:solidFill>
-                  <a:srgbClr val="6B6A66"/>
-                </a:solidFill>
-                <a:latin typeface="Be Vietnam Pro" pitchFamily="34" charset="0"/>
-                <a:ea typeface="Be Vietnam Pro" pitchFamily="34" charset="-122"/>
-                <a:cs typeface="Be Vietnam Pro" pitchFamily="34" charset="-120"/>
-              </a:rPr>
-              <a:t> xóa</a:t>
-            </a:r>
-            <a:r>
-              <a:rPr lang="en-US" sz="2100" dirty="0" spc="-4" kern="0">
-                <a:solidFill>
-                  <a:srgbClr val="6B6A66"/>
-                </a:solidFill>
-                <a:latin typeface="Be Vietnam Pro" pitchFamily="34" charset="0"/>
-                <a:ea typeface="Be Vietnam Pro" pitchFamily="34" charset="-122"/>
-                <a:cs typeface="Be Vietnam Pro" pitchFamily="34" charset="-120"/>
-              </a:rPr>
-              <a:t> khóa</a:t>
-            </a:r>
-            <a:r>
-              <a:rPr lang="en-US" sz="2100" dirty="0" spc="-2" kern="0">
-                <a:solidFill>
-                  <a:srgbClr val="6B6A66"/>
-                </a:solidFill>
-                <a:latin typeface="Be Vietnam Pro" pitchFamily="34" charset="0"/>
-                <a:ea typeface="Be Vietnam Pro" pitchFamily="34" charset="-122"/>
-                <a:cs typeface="Be Vietnam Pro" pitchFamily="34" charset="-120"/>
-              </a:rPr>
-              <a:t> phải</a:t>
-            </a:r>
-            <a:r>
-              <a:rPr lang="en-US" sz="2100" dirty="0" spc="-10" kern="0">
-                <a:solidFill>
-                  <a:srgbClr val="6B6A66"/>
-                </a:solidFill>
-                <a:latin typeface="Be Vietnam Pro" pitchFamily="34" charset="0"/>
-                <a:ea typeface="Be Vietnam Pro" pitchFamily="34" charset="-122"/>
-                <a:cs typeface="Be Vietnam Pro" pitchFamily="34" charset="-120"/>
-              </a:rPr>
-              <a:t> nguyên</a:t>
-            </a:r>
-            <a:r>
-              <a:rPr lang="en-US" sz="2100" dirty="0" spc="0" kern="0">
-                <a:solidFill>
-                  <a:srgbClr val="6B6A66"/>
-                </a:solidFill>
-                <a:latin typeface="Be Vietnam Pro" pitchFamily="34" charset="0"/>
-                <a:ea typeface="Be Vietnam Pro" pitchFamily="34" charset="-122"/>
-                <a:cs typeface="Be Vietnam Pro" pitchFamily="34" charset="-120"/>
-              </a:rPr>
-              <a:t> tử.</a:t>
             </a:r>
             <a:endParaRPr lang="en-US" sz="2100" dirty="0"/>
           </a:p>
@@ -11444,7 +10982,7 @@
               <a:t>Breaker</a:t>
             </a:r>
             <a:r>
-              <a:rPr lang="en-US" sz="2100" dirty="0" spc="-1" kern="0">
+              <a:rPr lang="en-US" sz="2100" dirty="0" spc="-2" kern="0">
                 <a:solidFill>
                   <a:srgbClr val="6B6A66"/>
                 </a:solidFill>
@@ -11452,10 +10990,10 @@
                 <a:ea typeface="Be Vietnam Pro" pitchFamily="34" charset="-122"/>
                 <a:cs typeface="Be Vietnam Pro" pitchFamily="34" charset="-120"/>
               </a:rPr>
-              <a:t> chỉ quanh</a:t>
-            </a:r>
-            <a:r>
-              <a:rPr lang="en-US" sz="2100" dirty="0" spc="-9" kern="0">
+              <a:t> quanh</a:t>
+            </a:r>
+            <a:r>
+              <a:rPr lang="en-US" sz="2100" dirty="0" spc="-8" kern="0">
                 <a:solidFill>
                   <a:srgbClr val="6B6A66"/>
                 </a:solidFill>
@@ -11477,7 +11015,7 @@
               <a:t> nhớ</a:t>
             </a:r>
             <a:r>
-              <a:rPr lang="en-US" sz="2100" dirty="0" spc="11" kern="0">
+              <a:rPr lang="en-US" sz="2100" dirty="0" spc="9" kern="0">
                 <a:solidFill>
                   <a:srgbClr val="6B6A66"/>
                 </a:solidFill>
@@ -11485,10 +11023,10 @@
                 <a:ea typeface="Be Vietnam Pro" pitchFamily="34" charset="-122"/>
                 <a:cs typeface="Be Vietnam Pro" pitchFamily="34" charset="-120"/>
               </a:rPr>
-              <a:t> đệm</a:t>
-            </a:r>
-            <a:r>
-              <a:rPr lang="en-US" sz="2100" dirty="0" spc="0" kern="0">
+              <a:t> đệm:</a:t>
+            </a:r>
+            <a:r>
+              <a:rPr lang="en-US" sz="2100" dirty="0" spc="-12" kern="0">
                 <a:solidFill>
                   <a:srgbClr val="6B6A66"/>
                 </a:solidFill>
@@ -11496,7 +11034,7 @@
                 <a:ea typeface="Be Vietnam Pro" pitchFamily="34" charset="-122"/>
                 <a:cs typeface="Be Vietnam Pro" pitchFamily="34" charset="-120"/>
               </a:rPr>
-              <a:t> thì</a:t>
+              <a:t> tải vẫn</a:t>
             </a:r>
             <a:r>
               <a:rPr lang="en-US" sz="2100" dirty="0" spc="-3" kern="0">
@@ -11507,10 +11045,10 @@
                 <a:ea typeface="Be Vietnam Pro" pitchFamily="34" charset="-122"/>
                 <a:cs typeface="Be Vietnam Pro" pitchFamily="34" charset="-120"/>
               </a:rPr>
-              <a:t> cơ</a:t>
-            </a:r>
-            <a:r>
-              <a:rPr lang="en-US" sz="2100" dirty="0" spc="-9" kern="0">
+              <a:t> dồn</a:t>
+            </a:r>
+            <a:r>
+              <a:rPr lang="en-US" sz="2100" dirty="0" spc="-16" kern="0">
                 <a:solidFill>
                   <a:srgbClr val="6B6A66"/>
                 </a:solidFill>
@@ -11518,62 +11056,7 @@
                 <a:ea typeface="Be Vietnam Pro" pitchFamily="34" charset="-122"/>
                 <a:cs typeface="Be Vietnam Pro" pitchFamily="34" charset="-120"/>
               </a:rPr>
-              <a:t> sở</a:t>
-            </a:r>
-            <a:r>
-              <a:rPr lang="en-US" sz="2100" dirty="0" spc="-2" kern="0">
-                <a:solidFill>
-                  <a:srgbClr val="6B6A66"/>
-                </a:solidFill>
-                <a:latin typeface="Be Vietnam Pro" pitchFamily="34" charset="0"/>
-                <a:ea typeface="Be Vietnam Pro" pitchFamily="34" charset="-122"/>
-                <a:cs typeface="Be Vietnam Pro" pitchFamily="34" charset="-120"/>
-              </a:rPr>
-              <a:t> dữ</a:t>
-            </a:r>
-            <a:r>
-              <a:rPr lang="en-US" sz="2100" dirty="0" spc="1" kern="0">
-                <a:solidFill>
-                  <a:srgbClr val="6B6A66"/>
-                </a:solidFill>
-                <a:latin typeface="Be Vietnam Pro" pitchFamily="34" charset="0"/>
-                <a:ea typeface="Be Vietnam Pro" pitchFamily="34" charset="-122"/>
-                <a:cs typeface="Be Vietnam Pro" pitchFamily="34" charset="-120"/>
-              </a:rPr>
-              <a:t> liệu</a:t>
-            </a:r>
-            <a:r>
-              <a:rPr lang="en-US" sz="2100" dirty="0" spc="-13" kern="0">
-                <a:solidFill>
-                  <a:srgbClr val="6B6A66"/>
-                </a:solidFill>
-                <a:latin typeface="Be Vietnam Pro" pitchFamily="34" charset="0"/>
-                <a:ea typeface="Be Vietnam Pro" pitchFamily="34" charset="-122"/>
-                <a:cs typeface="Be Vietnam Pro" pitchFamily="34" charset="-120"/>
-              </a:rPr>
-              <a:t> vẫn</a:t>
-            </a:r>
-            <a:r>
-              <a:rPr lang="en-US" sz="2100" dirty="0" spc="0" kern="0">
-                <a:solidFill>
-                  <a:srgbClr val="6B6A66"/>
-                </a:solidFill>
-                <a:latin typeface="Be Vietnam Pro" pitchFamily="34" charset="0"/>
-                <a:ea typeface="Be Vietnam Pro" pitchFamily="34" charset="-122"/>
-                <a:cs typeface="Be Vietnam Pro" pitchFamily="34" charset="-120"/>
-              </a:rPr>
-              <a:t> nhận đủ</a:t>
-            </a:r>
-            <a:r>
-              <a:rPr lang="en-US" sz="2100" dirty="0" spc="-9" kern="0">
-                <a:solidFill>
-                  <a:srgbClr val="6B6A66"/>
-                </a:solidFill>
-                <a:latin typeface="Be Vietnam Pro" pitchFamily="34" charset="0"/>
-                <a:ea typeface="Be Vietnam Pro" pitchFamily="34" charset="-122"/>
-                <a:cs typeface="Be Vietnam Pro" pitchFamily="34" charset="-120"/>
-              </a:rPr>
-              <a:t> tải.</a:t>
+              <a:t> về</a:t>
             </a:r>
             <a:endParaRPr lang="en-US" sz="2100" dirty="0"/>
           </a:p>
@@ -13648,7 +13131,7 @@
               <a:buNone/>
             </a:pPr>
             <a:r>
-              <a:rPr lang="en-US" sz="2850" dirty="0" spc="2" kern="0">
+              <a:rPr lang="en-US" sz="2850" dirty="0" spc="-2" kern="0">
                 <a:solidFill>
                   <a:srgbClr val="14161C"/>
                 </a:solidFill>
@@ -13656,7 +13139,7 @@
                 <a:ea typeface="Be Vietnam Pro" pitchFamily="34" charset="-122"/>
                 <a:cs typeface="Be Vietnam Pro" pitchFamily="34" charset="-120"/>
               </a:rPr>
-              <a:t>0</a:t>
+              <a:t>Nạp</a:t>
             </a:r>
             <a:r>
               <a:rPr lang="en-US" sz="2850" dirty="0" spc="0" kern="0">
@@ -13667,7 +13150,29 @@
                 <a:ea typeface="Be Vietnam Pro" pitchFamily="34" charset="-122"/>
                 <a:cs typeface="Be Vietnam Pro" pitchFamily="34" charset="-120"/>
               </a:rPr>
-              <a:t> giờ</a:t>
+              <a:t> lúc</a:t>
+            </a:r>
+            <a:r>
+              <a:rPr lang="en-US" sz="2850" dirty="0" spc="4" kern="0">
+                <a:solidFill>
+                  <a:srgbClr val="14161C"/>
+                </a:solidFill>
+                <a:latin typeface="Be Vietnam Pro" pitchFamily="34" charset="0"/>
+                <a:ea typeface="Be Vietnam Pro" pitchFamily="34" charset="-122"/>
+                <a:cs typeface="Be Vietnam Pro" pitchFamily="34" charset="-120"/>
+              </a:rPr>
+              <a:t> 0</a:t>
+            </a:r>
+            <a:r>
+              <a:rPr lang="en-US" sz="2850" dirty="0" spc="0" kern="0">
+                <a:solidFill>
+                  <a:srgbClr val="14161C"/>
+                </a:solidFill>
+                <a:latin typeface="Be Vietnam Pro" pitchFamily="34" charset="0"/>
+                <a:ea typeface="Be Vietnam Pro" pitchFamily="34" charset="-122"/>
+                <a:cs typeface="Be Vietnam Pro" pitchFamily="34" charset="-120"/>
+              </a:rPr>
+              <a:t> giờ,</a:t>
             </a:r>
             <a:r>
               <a:rPr lang="en-US" sz="2850" dirty="0" spc="-1" kern="0">
@@ -13678,10 +13183,10 @@
                 <a:ea typeface="Be Vietnam Pro" pitchFamily="34" charset="-122"/>
                 <a:cs typeface="Be Vietnam Pro" pitchFamily="34" charset="-120"/>
               </a:rPr>
-              <a:t> mỗi</a:t>
-            </a:r>
-            <a:r>
-              <a:rPr lang="en-US" sz="2850" dirty="0" spc="14" kern="0">
+              <a:t> hạn</a:t>
+            </a:r>
+            <a:r>
+              <a:rPr lang="en-US" sz="2850" dirty="0" spc="-25" kern="0">
                 <a:solidFill>
                   <a:srgbClr val="14161C"/>
                 </a:solidFill>
@@ -13689,10 +13194,10 @@
                 <a:ea typeface="Be Vietnam Pro" pitchFamily="34" charset="-122"/>
                 <a:cs typeface="Be Vietnam Pro" pitchFamily="34" charset="-120"/>
               </a:rPr>
-              <a:t> đêm</a:t>
-            </a:r>
-            <a:r>
-              <a:rPr lang="en-US" sz="2850" dirty="0" spc="-1" kern="0">
+              <a:t> 24</a:t>
+            </a:r>
+            <a:r>
+              <a:rPr lang="en-US" sz="2850" dirty="0" spc="0" kern="0">
                 <a:solidFill>
                   <a:srgbClr val="14161C"/>
                 </a:solidFill>
@@ -13700,10 +13205,10 @@
                 <a:ea typeface="Be Vietnam Pro" pitchFamily="34" charset="-122"/>
                 <a:cs typeface="Be Vietnam Pro" pitchFamily="34" charset="-120"/>
               </a:rPr>
-              <a:t> nạp</a:t>
-            </a:r>
-            <a:r>
-              <a:rPr lang="en-US" sz="2850" dirty="0" spc="3" kern="0">
+              <a:t> giờ:</a:t>
+            </a:r>
+            <a:r>
+              <a:rPr lang="en-US" sz="2850" dirty="0" spc="-4" kern="0">
                 <a:solidFill>
                   <a:srgbClr val="14161C"/>
                 </a:solidFill>
@@ -13711,10 +13216,10 @@
                 <a:ea typeface="Be Vietnam Pro" pitchFamily="34" charset="-122"/>
                 <a:cs typeface="Be Vietnam Pro" pitchFamily="34" charset="-120"/>
               </a:rPr>
-              <a:t> 50.000</a:t>
-            </a:r>
-            <a:r>
-              <a:rPr lang="en-US" sz="2850" dirty="0" spc="-3" kern="0">
+              <a:t> sao</a:t>
+            </a:r>
+            <a:r>
+              <a:rPr lang="en-US" sz="2850" dirty="0" spc="1" kern="0">
                 <a:solidFill>
                   <a:srgbClr val="14161C"/>
                 </a:solidFill>
@@ -13722,10 +13227,10 @@
                 <a:ea typeface="Be Vietnam Pro" pitchFamily="34" charset="-122"/>
                 <a:cs typeface="Be Vietnam Pro" pitchFamily="34" charset="-120"/>
               </a:rPr>
-              <a:t> khóa,</a:t>
-            </a:r>
-            <a:r>
-              <a:rPr lang="en-US" sz="2850" dirty="0" spc="0" kern="0">
+              <a:t> quá</a:t>
+            </a:r>
+            <a:r>
+              <a:rPr lang="en-US" sz="2850" dirty="0" spc="-12" kern="0">
                 <a:solidFill>
                   <a:srgbClr val="14161C"/>
                 </a:solidFill>
@@ -13733,161 +13238,7 @@
                 <a:ea typeface="Be Vietnam Pro" pitchFamily="34" charset="-122"/>
                 <a:cs typeface="Be Vietnam Pro" pitchFamily="34" charset="-120"/>
               </a:rPr>
-              <a:t> hạn</a:t>
-            </a:r>
-            <a:r>
-              <a:rPr lang="en-US" sz="2850" dirty="0" spc="-25" kern="0">
-                <a:solidFill>
-                  <a:srgbClr val="14161C"/>
-                </a:solidFill>
-                <a:latin typeface="Be Vietnam Pro" pitchFamily="34" charset="0"/>
-                <a:ea typeface="Be Vietnam Pro" pitchFamily="34" charset="-122"/>
-                <a:cs typeface="Be Vietnam Pro" pitchFamily="34" charset="-120"/>
-              </a:rPr>
-              <a:t> 24</a:t>
-            </a:r>
-            <a:r>
-              <a:rPr lang="en-US" sz="2850" dirty="0" spc="0" kern="0">
-                <a:solidFill>
-                  <a:srgbClr val="14161C"/>
-                </a:solidFill>
-                <a:latin typeface="Be Vietnam Pro" pitchFamily="34" charset="0"/>
-                <a:ea typeface="Be Vietnam Pro" pitchFamily="34" charset="-122"/>
-                <a:cs typeface="Be Vietnam Pro" pitchFamily="34" charset="-120"/>
-              </a:rPr>
-              <a:t> giờ.</a:t>
-            </a:r>
-            <a:r>
-              <a:rPr lang="en-US" sz="2850" dirty="0" spc="-2" kern="0">
-                <a:solidFill>
-                  <a:srgbClr val="14161C"/>
-                </a:solidFill>
-                <a:latin typeface="Be Vietnam Pro" pitchFamily="34" charset="0"/>
-                <a:ea typeface="Be Vietnam Pro" pitchFamily="34" charset="-122"/>
-                <a:cs typeface="Be Vietnam Pro" pitchFamily="34" charset="-120"/>
-              </a:rPr>
-              <a:t> Đúng</a:t>
-            </a:r>
-            <a:r>
-              <a:rPr lang="en-US" sz="2850" dirty="0" spc="4" kern="0">
-                <a:solidFill>
-                  <a:srgbClr val="14161C"/>
-                </a:solidFill>
-                <a:latin typeface="Be Vietnam Pro" pitchFamily="34" charset="0"/>
-                <a:ea typeface="Be Vietnam Pro" pitchFamily="34" charset="-122"/>
-                <a:cs typeface="Be Vietnam Pro" pitchFamily="34" charset="-120"/>
-              </a:rPr>
-              <a:t> 0</a:t>
-            </a:r>
-            <a:r>
-              <a:rPr lang="en-US" sz="2850" dirty="0" spc="-1" kern="0">
-                <a:solidFill>
-                  <a:srgbClr val="14161C"/>
-                </a:solidFill>
-                <a:latin typeface="Be Vietnam Pro" pitchFamily="34" charset="0"/>
-                <a:ea typeface="Be Vietnam Pro" pitchFamily="34" charset="-122"/>
-                <a:cs typeface="Be Vietnam Pro" pitchFamily="34" charset="-120"/>
-              </a:rPr>
-              <a:t> giờ</a:t>
-            </a:r>
-            <a:r>
-              <a:rPr lang="en-US" sz="2850" dirty="0" spc="14" kern="0">
-                <a:solidFill>
-                  <a:srgbClr val="14161C"/>
-                </a:solidFill>
-                <a:latin typeface="Be Vietnam Pro" pitchFamily="34" charset="0"/>
-                <a:ea typeface="Be Vietnam Pro" pitchFamily="34" charset="-122"/>
-                <a:cs typeface="Be Vietnam Pro" pitchFamily="34" charset="-120"/>
-              </a:rPr>
-              <a:t> đêm</a:t>
-            </a:r>
-            <a:r>
-              <a:rPr lang="en-US" sz="2850" dirty="0" spc="-4" kern="0">
-                <a:solidFill>
-                  <a:srgbClr val="14161C"/>
-                </a:solidFill>
-                <a:latin typeface="Be Vietnam Pro" pitchFamily="34" charset="0"/>
-                <a:ea typeface="Be Vietnam Pro" pitchFamily="34" charset="-122"/>
-                <a:cs typeface="Be Vietnam Pro" pitchFamily="34" charset="-120"/>
-              </a:rPr>
-              <a:t> sau,</a:t>
-            </a:r>
-            <a:r>
-              <a:rPr lang="en-US" sz="2850" dirty="0" spc="3" kern="0">
-                <a:solidFill>
-                  <a:srgbClr val="14161C"/>
-                </a:solidFill>
-                <a:latin typeface="Be Vietnam Pro" pitchFamily="34" charset="0"/>
-                <a:ea typeface="Be Vietnam Pro" pitchFamily="34" charset="-122"/>
-                <a:cs typeface="Be Vietnam Pro" pitchFamily="34" charset="-120"/>
-              </a:rPr>
-              <a:t> cơ</a:t>
-            </a:r>
-            <a:r>
-              <a:rPr lang="en-US" sz="2850" dirty="0" spc="-10" kern="0">
-                <a:solidFill>
-                  <a:srgbClr val="14161C"/>
-                </a:solidFill>
-                <a:latin typeface="Be Vietnam Pro" pitchFamily="34" charset="0"/>
-                <a:ea typeface="Be Vietnam Pro" pitchFamily="34" charset="-122"/>
-                <a:cs typeface="Be Vietnam Pro" pitchFamily="34" charset="-120"/>
-              </a:rPr>
-              <a:t> sở</a:t>
-            </a:r>
-            <a:r>
-              <a:rPr lang="en-US" sz="2850" dirty="0" spc="0" kern="0">
-                <a:solidFill>
-                  <a:srgbClr val="14161C"/>
-                </a:solidFill>
-                <a:latin typeface="Be Vietnam Pro" pitchFamily="34" charset="0"/>
-                <a:ea typeface="Be Vietnam Pro" pitchFamily="34" charset="-122"/>
-                <a:cs typeface="Be Vietnam Pro" pitchFamily="34" charset="-120"/>
-              </a:rPr>
-              <a:t> dữ</a:t>
-            </a:r>
-            <a:r>
-              <a:rPr lang="en-US" sz="2850" dirty="0" spc="1" kern="0">
-                <a:solidFill>
-                  <a:srgbClr val="14161C"/>
-                </a:solidFill>
-                <a:latin typeface="Be Vietnam Pro" pitchFamily="34" charset="0"/>
-                <a:ea typeface="Be Vietnam Pro" pitchFamily="34" charset="-122"/>
-                <a:cs typeface="Be Vietnam Pro" pitchFamily="34" charset="-120"/>
-              </a:rPr>
-              <a:t> liệu quá</a:t>
-            </a:r>
-            <a:r>
-              <a:rPr lang="en-US" sz="2850" dirty="0" spc="-11" kern="0">
-                <a:solidFill>
-                  <a:srgbClr val="14161C"/>
-                </a:solidFill>
-                <a:latin typeface="Be Vietnam Pro" pitchFamily="34" charset="0"/>
-                <a:ea typeface="Be Vietnam Pro" pitchFamily="34" charset="-122"/>
-                <a:cs typeface="Be Vietnam Pro" pitchFamily="34" charset="-120"/>
-              </a:rPr>
-              <a:t> tải.</a:t>
-            </a:r>
-            <a:r>
-              <a:rPr lang="en-US" sz="2850" dirty="0" spc="49" kern="0">
-                <a:solidFill>
-                  <a:srgbClr val="14161C"/>
-                </a:solidFill>
-                <a:latin typeface="Be Vietnam Pro" pitchFamily="34" charset="0"/>
-                <a:ea typeface="Be Vietnam Pro" pitchFamily="34" charset="-122"/>
-                <a:cs typeface="Be Vietnam Pro" pitchFamily="34" charset="-120"/>
-              </a:rPr>
-              <a:t> Vì</a:t>
-            </a:r>
-            <a:r>
-              <a:rPr lang="en-US" sz="2850" dirty="0" spc="-4" kern="0">
-                <a:solidFill>
-                  <a:srgbClr val="14161C"/>
-                </a:solidFill>
-                <a:latin typeface="Be Vietnam Pro" pitchFamily="34" charset="0"/>
-                <a:ea typeface="Be Vietnam Pro" pitchFamily="34" charset="-122"/>
-                <a:cs typeface="Be Vietnam Pro" pitchFamily="34" charset="-120"/>
-              </a:rPr>
-              <a:t> sao?</a:t>
+              <a:t> tải?</a:t>
             </a:r>
             <a:endParaRPr lang="en-US" sz="2850" dirty="0"/>
           </a:p>
@@ -14015,10 +13366,10 @@
                 <a:ea typeface="Be Vietnam Pro" pitchFamily="34" charset="-122"/>
                 <a:cs typeface="Be Vietnam Pro" pitchFamily="34" charset="-120"/>
               </a:rPr>
-              <a:t> phút:</a:t>
-            </a:r>
-            <a:r>
-              <a:rPr lang="en-US" sz="2400" dirty="0" spc="-2" kern="0">
+              <a:t> phút,</a:t>
+            </a:r>
+            <a:r>
+              <a:rPr lang="en-US" sz="2400" dirty="0" spc="-1" kern="0">
                 <a:solidFill>
                   <a:srgbClr val="14161C"/>
                 </a:solidFill>
@@ -14026,10 +13377,10 @@
                 <a:ea typeface="Be Vietnam Pro" pitchFamily="34" charset="-122"/>
                 <a:cs typeface="Be Vietnam Pro" pitchFamily="34" charset="-120"/>
               </a:rPr>
-              <a:t> 10.000 khóa</a:t>
-            </a:r>
-            <a:r>
-              <a:rPr lang="en-US" sz="2400" dirty="0" spc="3" kern="0">
+              <a:t> khi</a:t>
+            </a:r>
+            <a:r>
+              <a:rPr lang="en-US" sz="2400" dirty="0" spc="1" kern="0">
                 <a:solidFill>
                   <a:srgbClr val="14161C"/>
                 </a:solidFill>
@@ -14037,10 +13388,10 @@
                 <a:ea typeface="Be Vietnam Pro" pitchFamily="34" charset="-122"/>
                 <a:cs typeface="Be Vietnam Pro" pitchFamily="34" charset="-120"/>
               </a:rPr>
-              <a:t> thử,</a:t>
-            </a:r>
-            <a:r>
-              <a:rPr lang="en-US" sz="2400" dirty="0" spc="1" kern="0">
+              <a:t> cộng</a:t>
+            </a:r>
+            <a:r>
+              <a:rPr lang="en-US" sz="2400" dirty="0" spc="2" kern="0">
                 <a:solidFill>
                   <a:srgbClr val="14161C"/>
                 </a:solidFill>
@@ -14048,10 +13399,10 @@
                 <a:ea typeface="Be Vietnam Pro" pitchFamily="34" charset="-122"/>
                 <a:cs typeface="Be Vietnam Pro" pitchFamily="34" charset="-120"/>
               </a:rPr>
-              <a:t> hạn cộng</a:t>
-            </a:r>
-            <a:r>
-              <a:rPr lang="en-US" sz="2400" dirty="0" spc="2" kern="0">
+              <a:t> thêm</a:t>
+            </a:r>
+            <a:r>
+              <a:rPr lang="en-US" sz="2400" dirty="0" spc="-11" kern="0">
                 <a:solidFill>
                   <a:srgbClr val="14161C"/>
                 </a:solidFill>
@@ -14059,10 +13410,10 @@
                 <a:ea typeface="Be Vietnam Pro" pitchFamily="34" charset="-122"/>
                 <a:cs typeface="Be Vietnam Pro" pitchFamily="34" charset="-120"/>
               </a:rPr>
-              <a:t> thêm</a:t>
-            </a:r>
-            <a:r>
-              <a:rPr lang="en-US" sz="2400" dirty="0" spc="-11" kern="0">
+              <a:t> 0–599</a:t>
+            </a:r>
+            <a:r>
+              <a:rPr lang="en-US" sz="2400" dirty="0" spc="-6" kern="0">
                 <a:solidFill>
                   <a:srgbClr val="14161C"/>
                 </a:solidFill>
@@ -14070,62 +13421,7 @@
                 <a:ea typeface="Be Vietnam Pro" pitchFamily="34" charset="-122"/>
                 <a:cs typeface="Be Vietnam Pro" pitchFamily="34" charset="-120"/>
               </a:rPr>
-              <a:t> 0–599</a:t>
-            </a:r>
-            <a:r>
-              <a:rPr lang="en-US" sz="2400" dirty="0" spc="-4" kern="0">
-                <a:solidFill>
-                  <a:srgbClr val="14161C"/>
-                </a:solidFill>
-                <a:latin typeface="Be Vietnam Pro" pitchFamily="34" charset="0"/>
-                <a:ea typeface="Be Vietnam Pro" pitchFamily="34" charset="-122"/>
-                <a:cs typeface="Be Vietnam Pro" pitchFamily="34" charset="-120"/>
-              </a:rPr>
-              <a:t> giây;</a:t>
-            </a:r>
-            <a:r>
-              <a:rPr lang="en-US" sz="2400" dirty="0" spc="2" kern="0">
-                <a:solidFill>
-                  <a:srgbClr val="14161C"/>
-                </a:solidFill>
-                <a:latin typeface="Be Vietnam Pro" pitchFamily="34" charset="0"/>
-                <a:ea typeface="Be Vietnam Pro" pitchFamily="34" charset="-122"/>
-                <a:cs typeface="Be Vietnam Pro" pitchFamily="34" charset="-120"/>
-              </a:rPr>
-              <a:t> phút</a:t>
-            </a:r>
-            <a:r>
-              <a:rPr lang="en-US" sz="2400" dirty="0" spc="12" kern="0">
-                <a:solidFill>
-                  <a:srgbClr val="14161C"/>
-                </a:solidFill>
-                <a:latin typeface="Be Vietnam Pro" pitchFamily="34" charset="0"/>
-                <a:ea typeface="Be Vietnam Pro" pitchFamily="34" charset="-122"/>
-                <a:cs typeface="Be Vietnam Pro" pitchFamily="34" charset="-120"/>
-              </a:rPr>
-              <a:t> đông</a:t>
-            </a:r>
-            <a:r>
-              <a:rPr lang="en-US" sz="2400" dirty="0" spc="-8" kern="0">
-                <a:solidFill>
-                  <a:srgbClr val="14161C"/>
-                </a:solidFill>
-                <a:latin typeface="Be Vietnam Pro" pitchFamily="34" charset="0"/>
-                <a:ea typeface="Be Vietnam Pro" pitchFamily="34" charset="-122"/>
-                <a:cs typeface="Be Vietnam Pro" pitchFamily="34" charset="-120"/>
-              </a:rPr>
-              <a:t> nhất 1.042</a:t>
-            </a:r>
-            <a:r>
-              <a:rPr lang="en-US" sz="2400" dirty="0" spc="-2" kern="0">
-                <a:solidFill>
-                  <a:srgbClr val="14161C"/>
-                </a:solidFill>
-                <a:latin typeface="Be Vietnam Pro" pitchFamily="34" charset="0"/>
-                <a:ea typeface="Be Vietnam Pro" pitchFamily="34" charset="-122"/>
-                <a:cs typeface="Be Vietnam Pro" pitchFamily="34" charset="-120"/>
-              </a:rPr>
-              <a:t> khóa</a:t>
+              <a:t> giây</a:t>
             </a:r>
             <a:endParaRPr lang="en-US" sz="2400" dirty="0"/>
           </a:p>
@@ -14247,6 +13543,28 @@
               <a:t>Cùng</a:t>
             </a:r>
             <a:r>
+              <a:rPr lang="en-US" sz="2250" dirty="0" spc="-5" kern="0">
+                <a:solidFill>
+                  <a:srgbClr val="14161C"/>
+                </a:solidFill>
+                <a:latin typeface="Be Vietnam Pro" pitchFamily="34" charset="0"/>
+                <a:ea typeface="Be Vietnam Pro" pitchFamily="34" charset="-122"/>
+                <a:cs typeface="Be Vietnam Pro" pitchFamily="34" charset="-120"/>
+              </a:rPr>
+              <a:t> hết</a:t>
+            </a:r>
+            <a:r>
+              <a:rPr lang="en-US" sz="2250" dirty="0" spc="1" kern="0">
+                <a:solidFill>
+                  <a:srgbClr val="14161C"/>
+                </a:solidFill>
+                <a:latin typeface="Be Vietnam Pro" pitchFamily="34" charset="0"/>
+                <a:ea typeface="Be Vietnam Pro" pitchFamily="34" charset="-122"/>
+                <a:cs typeface="Be Vietnam Pro" pitchFamily="34" charset="-120"/>
+              </a:rPr>
+              <a:t> hạn:</a:t>
+            </a:r>
+            <a:r>
               <a:rPr lang="en-US" sz="2250" dirty="0" spc="0" kern="0">
                 <a:solidFill>
                   <a:srgbClr val="14161C"/>
@@ -14255,10 +13573,10 @@
                 <a:ea typeface="Be Vietnam Pro" pitchFamily="34" charset="-122"/>
                 <a:cs typeface="Be Vietnam Pro" pitchFamily="34" charset="-120"/>
               </a:rPr>
-              <a:t> nạp,</a:t>
-            </a:r>
-            <a:r>
-              <a:rPr lang="en-US" sz="2250" dirty="0" spc="3" kern="0">
+              <a:t> mọi</a:t>
+            </a:r>
+            <a:r>
+              <a:rPr lang="en-US" sz="2250" dirty="0" spc="8" kern="0">
                 <a:solidFill>
                   <a:srgbClr val="14161C"/>
                 </a:solidFill>
@@ -14266,10 +13584,10 @@
                 <a:ea typeface="Be Vietnam Pro" pitchFamily="34" charset="-122"/>
                 <a:cs typeface="Be Vietnam Pro" pitchFamily="34" charset="-120"/>
               </a:rPr>
-              <a:t> cùng</a:t>
-            </a:r>
-            <a:r>
-              <a:rPr lang="en-US" sz="2250" dirty="0" spc="-1" kern="0">
+              <a:t> lượt</a:t>
+            </a:r>
+            <a:r>
+              <a:rPr lang="en-US" sz="2250" dirty="0" spc="12" kern="0">
                 <a:solidFill>
                   <a:srgbClr val="14161C"/>
                 </a:solidFill>
@@ -14277,10 +13595,10 @@
                 <a:ea typeface="Be Vietnam Pro" pitchFamily="34" charset="-122"/>
                 <a:cs typeface="Be Vietnam Pro" pitchFamily="34" charset="-120"/>
               </a:rPr>
-              <a:t> hạn,</a:t>
-            </a:r>
-            <a:r>
-              <a:rPr lang="en-US" sz="2250" dirty="0" spc="2" kern="0">
+              <a:t> đọc</a:t>
+            </a:r>
+            <a:r>
+              <a:rPr lang="en-US" sz="2250" dirty="0" spc="6" kern="0">
                 <a:solidFill>
                   <a:srgbClr val="14161C"/>
                 </a:solidFill>
@@ -14288,10 +13606,10 @@
                 <a:ea typeface="Be Vietnam Pro" pitchFamily="34" charset="-122"/>
                 <a:cs typeface="Be Vietnam Pro" pitchFamily="34" charset="-120"/>
               </a:rPr>
-              <a:t> cùng</a:t>
-            </a:r>
-            <a:r>
-              <a:rPr lang="en-US" sz="2250" dirty="0" spc="-6" kern="0">
+              <a:t> trượt</a:t>
+            </a:r>
+            <a:r>
+              <a:rPr lang="en-US" sz="2250" dirty="0" spc="4" kern="0">
                 <a:solidFill>
                   <a:srgbClr val="14161C"/>
                 </a:solidFill>
@@ -14299,10 +13617,10 @@
                 <a:ea typeface="Be Vietnam Pro" pitchFamily="34" charset="-122"/>
                 <a:cs typeface="Be Vietnam Pro" pitchFamily="34" charset="-120"/>
               </a:rPr>
-              <a:t> hết</a:t>
-            </a:r>
-            <a:r>
-              <a:rPr lang="en-US" sz="2250" dirty="0" spc="-1" kern="0">
+              <a:t> dồn</a:t>
+            </a:r>
+            <a:r>
+              <a:rPr lang="en-US" sz="2250" dirty="0" spc="-11" kern="0">
                 <a:solidFill>
                   <a:srgbClr val="14161C"/>
                 </a:solidFill>
@@ -14310,128 +13628,7 @@
                 <a:ea typeface="Be Vietnam Pro" pitchFamily="34" charset="-122"/>
                 <a:cs typeface="Be Vietnam Pro" pitchFamily="34" charset="-120"/>
               </a:rPr>
-              <a:t> hạn;</a:t>
-            </a:r>
-            <a:r>
-              <a:rPr lang="en-US" sz="2250" dirty="0" spc="8" kern="0">
-                <a:solidFill>
-                  <a:srgbClr val="14161C"/>
-                </a:solidFill>
-                <a:latin typeface="Be Vietnam Pro" pitchFamily="34" charset="0"/>
-                <a:ea typeface="Be Vietnam Pro" pitchFamily="34" charset="-122"/>
-                <a:cs typeface="Be Vietnam Pro" pitchFamily="34" charset="-120"/>
-              </a:rPr>
-              <a:t> lượt</a:t>
-            </a:r>
-            <a:r>
-              <a:rPr lang="en-US" sz="2250" dirty="0" spc="12" kern="0">
-                <a:solidFill>
-                  <a:srgbClr val="14161C"/>
-                </a:solidFill>
-                <a:latin typeface="Be Vietnam Pro" pitchFamily="34" charset="0"/>
-                <a:ea typeface="Be Vietnam Pro" pitchFamily="34" charset="-122"/>
-                <a:cs typeface="Be Vietnam Pro" pitchFamily="34" charset="-120"/>
-              </a:rPr>
-              <a:t> đọc</a:t>
-            </a:r>
-            <a:r>
-              <a:rPr lang="en-US" sz="2250" dirty="0" spc="6" kern="0">
-                <a:solidFill>
-                  <a:srgbClr val="14161C"/>
-                </a:solidFill>
-                <a:latin typeface="Be Vietnam Pro" pitchFamily="34" charset="0"/>
-                <a:ea typeface="Be Vietnam Pro" pitchFamily="34" charset="-122"/>
-                <a:cs typeface="Be Vietnam Pro" pitchFamily="34" charset="-120"/>
-              </a:rPr>
-              <a:t> trượt</a:t>
-            </a:r>
-            <a:r>
-              <a:rPr lang="en-US" sz="2250" dirty="0" spc="4" kern="0">
-                <a:solidFill>
-                  <a:srgbClr val="14161C"/>
-                </a:solidFill>
-                <a:latin typeface="Be Vietnam Pro" pitchFamily="34" charset="0"/>
-                <a:ea typeface="Be Vietnam Pro" pitchFamily="34" charset="-122"/>
-                <a:cs typeface="Be Vietnam Pro" pitchFamily="34" charset="-120"/>
-              </a:rPr>
-              <a:t> dồn</a:t>
-            </a:r>
-            <a:r>
-              <a:rPr lang="en-US" sz="2250" dirty="0" spc="-14" kern="0">
-                <a:solidFill>
-                  <a:srgbClr val="14161C"/>
-                </a:solidFill>
-                <a:latin typeface="Be Vietnam Pro" pitchFamily="34" charset="0"/>
-                <a:ea typeface="Be Vietnam Pro" pitchFamily="34" charset="-122"/>
-                <a:cs typeface="Be Vietnam Pro" pitchFamily="34" charset="-120"/>
-              </a:rPr>
-              <a:t> về,</a:t>
-            </a:r>
-            <a:r>
-              <a:rPr lang="en-US" sz="2250" dirty="0" spc="2" kern="0">
-                <a:solidFill>
-                  <a:srgbClr val="14161C"/>
-                </a:solidFill>
-                <a:latin typeface="Be Vietnam Pro" pitchFamily="34" charset="0"/>
-                <a:ea typeface="Be Vietnam Pro" pitchFamily="34" charset="-122"/>
-                <a:cs typeface="Be Vietnam Pro" pitchFamily="34" charset="-120"/>
-              </a:rPr>
-              <a:t> chồng</a:t>
-            </a:r>
-            <a:r>
-              <a:rPr lang="en-US" sz="2250" dirty="0" spc="0" kern="0">
-                <a:solidFill>
-                  <a:srgbClr val="14161C"/>
-                </a:solidFill>
-                <a:latin typeface="Be Vietnam Pro" pitchFamily="34" charset="0"/>
-                <a:ea typeface="Be Vietnam Pro" pitchFamily="34" charset="-122"/>
-                <a:cs typeface="Be Vietnam Pro" pitchFamily="34" charset="-120"/>
-              </a:rPr>
-              <a:t> lên</a:t>
-            </a:r>
-            <a:r>
-              <a:rPr lang="en-US" sz="2250" dirty="0" spc="-10" kern="0">
-                <a:solidFill>
-                  <a:srgbClr val="14161C"/>
-                </a:solidFill>
-                <a:latin typeface="Be Vietnam Pro" pitchFamily="34" charset="0"/>
-                <a:ea typeface="Be Vietnam Pro" pitchFamily="34" charset="-122"/>
-                <a:cs typeface="Be Vietnam Pro" pitchFamily="34" charset="-120"/>
-              </a:rPr>
-              <a:t> tác</a:t>
-            </a:r>
-            <a:r>
-              <a:rPr lang="en-US" sz="2250" dirty="0" spc="2" kern="0">
-                <a:solidFill>
-                  <a:srgbClr val="14161C"/>
-                </a:solidFill>
-                <a:latin typeface="Be Vietnam Pro" pitchFamily="34" charset="0"/>
-                <a:ea typeface="Be Vietnam Pro" pitchFamily="34" charset="-122"/>
-                <a:cs typeface="Be Vietnam Pro" pitchFamily="34" charset="-120"/>
-              </a:rPr>
-              <a:t> vụ</a:t>
-            </a:r>
-            <a:r>
-              <a:rPr lang="en-US" sz="2250" dirty="0" spc="1" kern="0">
-                <a:solidFill>
-                  <a:srgbClr val="14161C"/>
-                </a:solidFill>
-                <a:latin typeface="Be Vietnam Pro" pitchFamily="34" charset="0"/>
-                <a:ea typeface="Be Vietnam Pro" pitchFamily="34" charset="-122"/>
-                <a:cs typeface="Be Vietnam Pro" pitchFamily="34" charset="-120"/>
-              </a:rPr>
-              <a:t> nạp</a:t>
-            </a:r>
-            <a:r>
-              <a:rPr lang="en-US" sz="2250" dirty="0" spc="0" kern="0">
-                <a:solidFill>
-                  <a:srgbClr val="14161C"/>
-                </a:solidFill>
-                <a:latin typeface="Be Vietnam Pro" pitchFamily="34" charset="0"/>
-                <a:ea typeface="Be Vietnam Pro" pitchFamily="34" charset="-122"/>
-                <a:cs typeface="Be Vietnam Pro" pitchFamily="34" charset="-120"/>
-              </a:rPr>
-              <a:t> lại.</a:t>
+              <a:t> về.</a:t>
             </a:r>
             <a:endParaRPr lang="en-US" sz="2250" dirty="0"/>
           </a:p>
@@ -14531,6 +13728,39 @@
               <a:buNone/>
             </a:pPr>
             <a:r>
+              <a:rPr lang="en-US" sz="2250" dirty="0" spc="-3" kern="0">
+                <a:solidFill>
+                  <a:srgbClr val="14161C"/>
+                </a:solidFill>
+                <a:latin typeface="Be Vietnam Pro" pitchFamily="34" charset="0"/>
+                <a:ea typeface="Be Vietnam Pro" pitchFamily="34" charset="-122"/>
+                <a:cs typeface="Be Vietnam Pro" pitchFamily="34" charset="-120"/>
+              </a:rPr>
+              <a:t>Hạn</a:t>
+            </a:r>
+            <a:r>
+              <a:rPr lang="en-US" sz="2250" dirty="0" spc="2" kern="0">
+                <a:solidFill>
+                  <a:srgbClr val="14161C"/>
+                </a:solidFill>
+                <a:latin typeface="Be Vietnam Pro" pitchFamily="34" charset="0"/>
+                <a:ea typeface="Be Vietnam Pro" pitchFamily="34" charset="-122"/>
+                <a:cs typeface="Be Vietnam Pro" pitchFamily="34" charset="-120"/>
+              </a:rPr>
+              <a:t> cộng</a:t>
+            </a:r>
+            <a:r>
+              <a:rPr lang="en-US" sz="2250" dirty="0" spc="-9" kern="0">
+                <a:solidFill>
+                  <a:srgbClr val="14161C"/>
+                </a:solidFill>
+                <a:latin typeface="Be Vietnam Pro" pitchFamily="34" charset="0"/>
+                <a:ea typeface="Be Vietnam Pro" pitchFamily="34" charset="-122"/>
+                <a:cs typeface="Be Vietnam Pro" pitchFamily="34" charset="-120"/>
+              </a:rPr>
+              <a:t> ngẫu</a:t>
+            </a:r>
+            <a:r>
               <a:rPr lang="en-US" sz="2250" dirty="0" spc="-1" kern="0">
                 <a:solidFill>
                   <a:srgbClr val="14161C"/>
@@ -14539,10 +13769,10 @@
                 <a:ea typeface="Be Vietnam Pro" pitchFamily="34" charset="-122"/>
                 <a:cs typeface="Be Vietnam Pro" pitchFamily="34" charset="-120"/>
               </a:rPr>
-              <a:t>Cộng</a:t>
-            </a:r>
-            <a:r>
-              <a:rPr lang="en-US" sz="2250" dirty="0" spc="-3" kern="0">
+              <a:t> nhiên;</a:t>
+            </a:r>
+            <a:r>
+              <a:rPr lang="en-US" sz="2250" dirty="0" spc="-2" kern="0">
                 <a:solidFill>
                   <a:srgbClr val="14161C"/>
                 </a:solidFill>
@@ -14550,98 +13780,10 @@
                 <a:ea typeface="Be Vietnam Pro" pitchFamily="34" charset="-122"/>
                 <a:cs typeface="Be Vietnam Pro" pitchFamily="34" charset="-120"/>
               </a:rPr>
-              <a:t> khoảng</a:t>
-            </a:r>
-            <a:r>
-              <a:rPr lang="en-US" sz="2250" dirty="0" spc="-10" kern="0">
-                <a:solidFill>
-                  <a:srgbClr val="14161C"/>
-                </a:solidFill>
-                <a:latin typeface="Be Vietnam Pro" pitchFamily="34" charset="0"/>
-                <a:ea typeface="Be Vietnam Pro" pitchFamily="34" charset="-122"/>
-                <a:cs typeface="Be Vietnam Pro" pitchFamily="34" charset="-120"/>
-              </a:rPr>
-              <a:t> ngẫu</a:t>
-            </a:r>
-            <a:r>
-              <a:rPr lang="en-US" sz="2250" dirty="0" spc="0" kern="0">
-                <a:solidFill>
-                  <a:srgbClr val="14161C"/>
-                </a:solidFill>
-                <a:latin typeface="Be Vietnam Pro" pitchFamily="34" charset="0"/>
-                <a:ea typeface="Be Vietnam Pro" pitchFamily="34" charset="-122"/>
-                <a:cs typeface="Be Vietnam Pro" pitchFamily="34" charset="-120"/>
-              </a:rPr>
-              <a:t> nhiên</a:t>
-            </a:r>
-            <a:r>
-              <a:rPr lang="en-US" sz="2250" dirty="0" spc="-14" kern="0">
-                <a:solidFill>
-                  <a:srgbClr val="14161C"/>
-                </a:solidFill>
-                <a:latin typeface="Be Vietnam Pro" pitchFamily="34" charset="0"/>
-                <a:ea typeface="Be Vietnam Pro" pitchFamily="34" charset="-122"/>
-                <a:cs typeface="Be Vietnam Pro" pitchFamily="34" charset="-120"/>
-              </a:rPr>
-              <a:t> vào</a:t>
-            </a:r>
-            <a:r>
-              <a:rPr lang="en-US" sz="2250" dirty="0" spc="0" kern="0">
-                <a:solidFill>
-                  <a:srgbClr val="14161C"/>
-                </a:solidFill>
-                <a:latin typeface="Be Vietnam Pro" pitchFamily="34" charset="0"/>
-                <a:ea typeface="Be Vietnam Pro" pitchFamily="34" charset="-122"/>
-                <a:cs typeface="Be Vietnam Pro" pitchFamily="34" charset="-120"/>
-              </a:rPr>
-              <a:t> hạn</a:t>
-            </a:r>
-            <a:r>
-              <a:rPr lang="en-US" sz="2250" dirty="0" spc="20" kern="0">
-                <a:solidFill>
-                  <a:srgbClr val="14161C"/>
-                </a:solidFill>
-                <a:latin typeface="Be Vietnam Pro" pitchFamily="34" charset="0"/>
-                <a:ea typeface="Be Vietnam Pro" pitchFamily="34" charset="-122"/>
-                <a:cs typeface="Be Vietnam Pro" pitchFamily="34" charset="-120"/>
-              </a:rPr>
-              <a:t> từng</a:t>
-            </a:r>
-            <a:r>
-              <a:rPr lang="en-US" sz="2250" dirty="0" spc="-3" kern="0">
-                <a:solidFill>
-                  <a:srgbClr val="14161C"/>
-                </a:solidFill>
-                <a:latin typeface="Be Vietnam Pro" pitchFamily="34" charset="0"/>
-                <a:ea typeface="Be Vietnam Pro" pitchFamily="34" charset="-122"/>
-                <a:cs typeface="Be Vietnam Pro" pitchFamily="34" charset="-120"/>
-              </a:rPr>
-              <a:t> khóa;</a:t>
-            </a:r>
-            <a:r>
-              <a:rPr lang="en-US" sz="2250" dirty="0" spc="-2" kern="0">
-                <a:solidFill>
-                  <a:srgbClr val="14161C"/>
-                </a:solidFill>
-                <a:latin typeface="Be Vietnam Pro" pitchFamily="34" charset="0"/>
-                <a:ea typeface="Be Vietnam Pro" pitchFamily="34" charset="-122"/>
-                <a:cs typeface="Be Vietnam Pro" pitchFamily="34" charset="-120"/>
-              </a:rPr>
               <a:t> khóa</a:t>
             </a:r>
             <a:r>
-              <a:rPr lang="en-US" sz="2250" dirty="0" spc="-35" kern="0">
-                <a:solidFill>
-                  <a:srgbClr val="14161C"/>
-                </a:solidFill>
-                <a:latin typeface="Be Vietnam Pro" pitchFamily="34" charset="0"/>
-                <a:ea typeface="Be Vietnam Pro" pitchFamily="34" charset="-122"/>
-                <a:cs typeface="Be Vietnam Pro" pitchFamily="34" charset="-120"/>
-              </a:rPr>
-              <a:t> rất</a:t>
-            </a:r>
-            <a:r>
-              <a:rPr lang="en-US" sz="2250" dirty="0" spc="2" kern="0">
+              <a:rPr lang="en-US" sz="2250" dirty="0" spc="1" kern="0">
                 <a:solidFill>
                   <a:srgbClr val="14161C"/>
                 </a:solidFill>
@@ -15614,7 +14756,7 @@
               <a:t> bộ</a:t>
             </a:r>
             <a:r>
-              <a:rPr lang="en-US" sz="2400" dirty="0" spc="1" kern="0">
+              <a:rPr lang="en-US" sz="2400" dirty="0" spc="14" kern="0">
                 <a:solidFill>
                   <a:srgbClr val="14161C"/>
                 </a:solidFill>
@@ -15622,10 +14764,10 @@
                 <a:ea typeface="Be Vietnam Pro" pitchFamily="34" charset="-122"/>
                 <a:cs typeface="Be Vietnam Pro" pitchFamily="34" charset="-120"/>
               </a:rPr>
-              <a:t> nhớ</a:t>
-            </a:r>
-            <a:r>
-              <a:rPr lang="en-US" sz="2400" dirty="0" spc="14" kern="0">
+              <a:t> đệm</a:t>
+            </a:r>
+            <a:r>
+              <a:rPr lang="en-US" sz="2400" dirty="0" spc="2" kern="0">
                 <a:solidFill>
                   <a:srgbClr val="14161C"/>
                 </a:solidFill>
@@ -15633,10 +14775,10 @@
                 <a:ea typeface="Be Vietnam Pro" pitchFamily="34" charset="-122"/>
                 <a:cs typeface="Be Vietnam Pro" pitchFamily="34" charset="-120"/>
               </a:rPr>
-              <a:t> đệm</a:t>
-            </a:r>
-            <a:r>
-              <a:rPr lang="en-US" sz="2400" dirty="0" spc="1" kern="0">
+              <a:t> lẫn</a:t>
+            </a:r>
+            <a:r>
+              <a:rPr lang="en-US" sz="2400" dirty="0" spc="0" kern="0">
                 <a:solidFill>
                   <a:srgbClr val="14161C"/>
                 </a:solidFill>
@@ -15644,10 +14786,10 @@
                 <a:ea typeface="Be Vietnam Pro" pitchFamily="34" charset="-122"/>
                 <a:cs typeface="Be Vietnam Pro" pitchFamily="34" charset="-120"/>
               </a:rPr>
-              <a:t> lẫn cơ</a:t>
-            </a:r>
-            <a:r>
-              <a:rPr lang="en-US" sz="2400" dirty="0" spc="-8" kern="0">
+              <a:t> cơ</a:t>
+            </a:r>
+            <a:r>
+              <a:rPr lang="en-US" sz="2400" dirty="0" spc="-9" kern="0">
                 <a:solidFill>
                   <a:srgbClr val="14161C"/>
                 </a:solidFill>
@@ -15658,7 +14800,7 @@
               <a:t> sở</a:t>
             </a:r>
             <a:r>
-              <a:rPr lang="en-US" sz="2400" dirty="0" spc="3" kern="0">
+              <a:rPr lang="en-US" sz="2400" dirty="0" spc="4" kern="0">
                 <a:solidFill>
                   <a:srgbClr val="14161C"/>
                 </a:solidFill>
@@ -15669,7 +14811,7 @@
               <a:t> dữ</a:t>
             </a:r>
             <a:r>
-              <a:rPr lang="en-US" sz="2400" dirty="0" spc="-1" kern="0">
+              <a:rPr lang="en-US" sz="2400" dirty="0" spc="-2" kern="0">
                 <a:solidFill>
                   <a:srgbClr val="14161C"/>
                 </a:solidFill>

--- a/system-design-101/vi/lessons/sd-06-015/slides/sd-06-015.pptx
+++ b/system-design-101/vi/lessons/sd-06-015/slides/sd-06-015.pptx
@@ -6255,7 +6255,7 @@
               <a:buNone/>
             </a:pPr>
             <a:r>
-              <a:rPr lang="en-US" sz="2250" dirty="0" spc="3" kern="0">
+              <a:rPr lang="en-US" sz="2250" dirty="0" spc="1" kern="0">
                 <a:solidFill>
                   <a:srgbClr val="6B6A66"/>
                 </a:solidFill>
@@ -6263,7 +6263,40 @@
                 <a:ea typeface="Be Vietnam Pro" pitchFamily="34" charset="-122"/>
                 <a:cs typeface="Be Vietnam Pro" pitchFamily="34" charset="-120"/>
               </a:rPr>
-              <a:t>—</a:t>
+              <a:t>Không</a:t>
+            </a:r>
+            <a:r>
+              <a:rPr lang="en-US" sz="2250" dirty="0" spc="5" kern="0">
+                <a:solidFill>
+                  <a:srgbClr val="6B6A66"/>
+                </a:solidFill>
+                <a:latin typeface="Be Vietnam Pro" pitchFamily="34" charset="0"/>
+                <a:ea typeface="Be Vietnam Pro" pitchFamily="34" charset="-122"/>
+                <a:cs typeface="Be Vietnam Pro" pitchFamily="34" charset="-120"/>
+              </a:rPr>
+              <a:t> có</a:t>
+            </a:r>
+            <a:r>
+              <a:rPr lang="en-US" sz="2250" dirty="0" spc="-2" kern="0">
+                <a:solidFill>
+                  <a:srgbClr val="6B6A66"/>
+                </a:solidFill>
+                <a:latin typeface="Be Vietnam Pro" pitchFamily="34" charset="0"/>
+                <a:ea typeface="Be Vietnam Pro" pitchFamily="34" charset="-122"/>
+                <a:cs typeface="Be Vietnam Pro" pitchFamily="34" charset="-120"/>
+              </a:rPr>
+              <a:t> kiểu</a:t>
+            </a:r>
+            <a:r>
+              <a:rPr lang="en-US" sz="2250" dirty="0" spc="-1" kern="0">
+                <a:solidFill>
+                  <a:srgbClr val="6B6A66"/>
+                </a:solidFill>
+                <a:latin typeface="Be Vietnam Pro" pitchFamily="34" charset="0"/>
+                <a:ea typeface="Be Vietnam Pro" pitchFamily="34" charset="-122"/>
+                <a:cs typeface="Be Vietnam Pro" pitchFamily="34" charset="-120"/>
+              </a:rPr>
+              <a:t> nào</a:t>
             </a:r>
             <a:endParaRPr lang="en-US" sz="2250" dirty="0"/>
           </a:p>
